--- a/docs/Final poster (UPDATED).pptx
+++ b/docs/Final poster (UPDATED).pptx
@@ -4110,494 +4110,36 @@
           <a:chExt cx="0" cy="0"/>
         </a:xfrm>
       </p:grpSpPr>
-      <p:grpSp>
-        <p:nvGrpSpPr>
-          <p:cNvPr id="14372" name="Group 14371"/>
-          <p:cNvGrpSpPr/>
-          <p:nvPr/>
-        </p:nvGrpSpPr>
-        <p:grpSpPr>
-          <a:xfrm>
-            <a:off x="28875508" y="5041579"/>
-            <a:ext cx="14106525" cy="7272808"/>
-            <a:chOff x="28875508" y="5041579"/>
-            <a:chExt cx="14106525" cy="7272808"/>
-          </a:xfrm>
-        </p:grpSpPr>
-        <p:pic>
-          <p:nvPicPr>
-            <p:cNvPr id="14368" name="Picture 14367"/>
-            <p:cNvPicPr>
-              <a:picLocks noChangeAspect="1"/>
-            </p:cNvPicPr>
-            <p:nvPr/>
-          </p:nvPicPr>
-          <p:blipFill>
-            <a:blip r:embed="rId3"/>
-            <a:stretch>
-              <a:fillRect/>
-            </a:stretch>
-          </p:blipFill>
-          <p:spPr>
-            <a:xfrm>
-              <a:off x="28875508" y="5389712"/>
-              <a:ext cx="14106525" cy="6924675"/>
-            </a:xfrm>
-            <a:prstGeom prst="rect">
-              <a:avLst/>
-            </a:prstGeom>
-          </p:spPr>
-        </p:pic>
-        <p:sp>
-          <p:nvSpPr>
-            <p:cNvPr id="41" name="TextBox 40"/>
-            <p:cNvSpPr txBox="1"/>
-            <p:nvPr/>
-          </p:nvSpPr>
-          <p:spPr>
-            <a:xfrm>
-              <a:off x="31971852" y="5041579"/>
-              <a:ext cx="432048" cy="646331"/>
-            </a:xfrm>
-            <a:prstGeom prst="rect">
-              <a:avLst/>
-            </a:prstGeom>
-            <a:noFill/>
-          </p:spPr>
-          <p:txBody>
-            <a:bodyPr wrap="square" rtlCol="0">
-              <a:spAutoFit/>
-            </a:bodyPr>
-            <a:lstStyle/>
-            <a:p>
-              <a:r>
-                <a:rPr lang="en-US" sz="3600" dirty="0"/>
-                <a:t>B</a:t>
-              </a:r>
-            </a:p>
-          </p:txBody>
-        </p:sp>
-        <p:sp>
-          <p:nvSpPr>
-            <p:cNvPr id="44" name="TextBox 43"/>
-            <p:cNvSpPr txBox="1"/>
-            <p:nvPr/>
-          </p:nvSpPr>
-          <p:spPr>
-            <a:xfrm>
-              <a:off x="37444460" y="5041579"/>
-              <a:ext cx="432048" cy="646331"/>
-            </a:xfrm>
-            <a:prstGeom prst="rect">
-              <a:avLst/>
-            </a:prstGeom>
-            <a:noFill/>
-          </p:spPr>
-          <p:txBody>
-            <a:bodyPr wrap="square" rtlCol="0">
-              <a:spAutoFit/>
-            </a:bodyPr>
-            <a:lstStyle/>
-            <a:p>
-              <a:r>
-                <a:rPr lang="en-US" sz="3600" dirty="0"/>
-                <a:t>C</a:t>
-              </a:r>
-            </a:p>
-          </p:txBody>
-        </p:sp>
-        <p:sp>
-          <p:nvSpPr>
-            <p:cNvPr id="136" name="TextBox 135"/>
-            <p:cNvSpPr txBox="1"/>
-            <p:nvPr/>
-          </p:nvSpPr>
-          <p:spPr>
-            <a:xfrm>
-              <a:off x="28947516" y="8425955"/>
-              <a:ext cx="518065" cy="646331"/>
-            </a:xfrm>
-            <a:prstGeom prst="rect">
-              <a:avLst/>
-            </a:prstGeom>
-            <a:noFill/>
-          </p:spPr>
-          <p:txBody>
-            <a:bodyPr wrap="none" rtlCol="0">
-              <a:spAutoFit/>
-            </a:bodyPr>
-            <a:lstStyle/>
-            <a:p>
-              <a:r>
-                <a:rPr lang="en-US" sz="3600" dirty="0"/>
-                <a:t>D</a:t>
-              </a:r>
-            </a:p>
-          </p:txBody>
-        </p:sp>
-        <p:sp>
-          <p:nvSpPr>
-            <p:cNvPr id="137" name="TextBox 136"/>
-            <p:cNvSpPr txBox="1"/>
-            <p:nvPr/>
-          </p:nvSpPr>
-          <p:spPr>
-            <a:xfrm>
-              <a:off x="31971852" y="8425955"/>
-              <a:ext cx="432048" cy="646331"/>
-            </a:xfrm>
-            <a:prstGeom prst="rect">
-              <a:avLst/>
-            </a:prstGeom>
-            <a:noFill/>
-          </p:spPr>
-          <p:txBody>
-            <a:bodyPr wrap="square" rtlCol="0">
-              <a:spAutoFit/>
-            </a:bodyPr>
-            <a:lstStyle/>
-            <a:p>
-              <a:r>
-                <a:rPr lang="en-US" sz="3600" dirty="0"/>
-                <a:t>E</a:t>
-              </a:r>
-            </a:p>
-          </p:txBody>
-        </p:sp>
-        <p:sp>
-          <p:nvSpPr>
-            <p:cNvPr id="138" name="TextBox 137"/>
-            <p:cNvSpPr txBox="1"/>
-            <p:nvPr/>
-          </p:nvSpPr>
-          <p:spPr>
-            <a:xfrm>
-              <a:off x="37444460" y="8425955"/>
-              <a:ext cx="432048" cy="646331"/>
-            </a:xfrm>
-            <a:prstGeom prst="rect">
-              <a:avLst/>
-            </a:prstGeom>
-            <a:noFill/>
-          </p:spPr>
-          <p:txBody>
-            <a:bodyPr wrap="square" rtlCol="0">
-              <a:spAutoFit/>
-            </a:bodyPr>
-            <a:lstStyle/>
-            <a:p>
-              <a:r>
-                <a:rPr lang="en-US" sz="3600" dirty="0"/>
-                <a:t>F</a:t>
-              </a:r>
-            </a:p>
-          </p:txBody>
-        </p:sp>
-      </p:grpSp>
-      <p:sp>
-        <p:nvSpPr>
-          <p:cNvPr id="131" name="TextBox 130"/>
-          <p:cNvSpPr txBox="1"/>
-          <p:nvPr/>
-        </p:nvSpPr>
-        <p:spPr>
-          <a:xfrm>
-            <a:off x="23918391" y="25379779"/>
-            <a:ext cx="4357745" cy="4154984"/>
-          </a:xfrm>
-          <a:prstGeom prst="rect">
-            <a:avLst/>
-          </a:prstGeom>
-          <a:solidFill>
-            <a:schemeClr val="bg1"/>
-          </a:solidFill>
-          <a:ln w="76200">
-            <a:solidFill>
-              <a:schemeClr val="bg1">
-                <a:lumMod val="50000"/>
-              </a:schemeClr>
-            </a:solidFill>
-          </a:ln>
-        </p:spPr>
-        <p:txBody>
-          <a:bodyPr wrap="square" rtlCol="0">
-            <a:spAutoFit/>
-          </a:bodyPr>
-          <a:lstStyle/>
-          <a:p>
-            <a:pPr algn="ctr" defTabSz="942975"/>
-            <a:r>
-              <a:rPr lang="en-CA" dirty="0">
-                <a:solidFill>
-                  <a:schemeClr val="bg1">
-                    <a:lumMod val="50000"/>
-                  </a:schemeClr>
-                </a:solidFill>
-              </a:rPr>
-              <a:t>Insert an image to visualize what is being quantified in the graph to the left</a:t>
-            </a:r>
-          </a:p>
-          <a:p>
-            <a:pPr algn="ctr"/>
-            <a:endParaRPr lang="en-CA" dirty="0">
-              <a:solidFill>
-                <a:schemeClr val="bg1">
-                  <a:lumMod val="50000"/>
-                </a:schemeClr>
-              </a:solidFill>
-            </a:endParaRPr>
-          </a:p>
-          <a:p>
-            <a:pPr algn="ctr"/>
-            <a:endParaRPr lang="en-CA" dirty="0">
-              <a:solidFill>
-                <a:schemeClr val="bg1">
-                  <a:lumMod val="50000"/>
-                </a:schemeClr>
-              </a:solidFill>
-            </a:endParaRPr>
-          </a:p>
-          <a:p>
-            <a:pPr algn="ctr"/>
-            <a:endParaRPr lang="en-CA" dirty="0">
-              <a:solidFill>
-                <a:schemeClr val="bg1">
-                  <a:lumMod val="50000"/>
-                </a:schemeClr>
-              </a:solidFill>
-            </a:endParaRPr>
-          </a:p>
-          <a:p>
-            <a:pPr algn="ctr"/>
-            <a:endParaRPr lang="en-CA" dirty="0">
-              <a:solidFill>
-                <a:schemeClr val="bg1">
-                  <a:lumMod val="50000"/>
-                </a:schemeClr>
-              </a:solidFill>
-            </a:endParaRPr>
-          </a:p>
-          <a:p>
-            <a:pPr algn="ctr"/>
-            <a:endParaRPr lang="en-CA" dirty="0">
-              <a:solidFill>
-                <a:schemeClr val="bg1">
-                  <a:lumMod val="50000"/>
-                </a:schemeClr>
-              </a:solidFill>
-            </a:endParaRPr>
-          </a:p>
-          <a:p>
-            <a:pPr algn="ctr"/>
-            <a:endParaRPr lang="en-CA" dirty="0">
-              <a:solidFill>
-                <a:schemeClr val="bg1">
-                  <a:lumMod val="50000"/>
-                </a:schemeClr>
-              </a:solidFill>
-            </a:endParaRPr>
-          </a:p>
-          <a:p>
-            <a:pPr algn="ctr"/>
-            <a:endParaRPr lang="en-CA" dirty="0">
-              <a:solidFill>
-                <a:schemeClr val="bg1">
-                  <a:lumMod val="50000"/>
-                </a:schemeClr>
-              </a:solidFill>
-            </a:endParaRPr>
-          </a:p>
-          <a:p>
-            <a:pPr algn="ctr"/>
-            <a:endParaRPr lang="en-CA" dirty="0">
-              <a:solidFill>
-                <a:schemeClr val="bg1">
-                  <a:lumMod val="50000"/>
-                </a:schemeClr>
-              </a:solidFill>
-            </a:endParaRPr>
-          </a:p>
-        </p:txBody>
-      </p:sp>
       <p:pic>
         <p:nvPicPr>
-          <p:cNvPr id="128" name="Picture 127"/>
+          <p:cNvPr id="12" name="Picture 11">
+            <a:extLst>
+              <a:ext uri="{FF2B5EF4-FFF2-40B4-BE49-F238E27FC236}">
+                <a16:creationId xmlns:a16="http://schemas.microsoft.com/office/drawing/2014/main" id="{9279F450-DBFD-A9CF-3E71-9DD7075C5A07}"/>
+              </a:ext>
+            </a:extLst>
+          </p:cNvPr>
           <p:cNvPicPr>
             <a:picLocks noChangeAspect="1"/>
           </p:cNvPicPr>
           <p:nvPr/>
         </p:nvPicPr>
         <p:blipFill>
-          <a:blip r:embed="rId4"/>
+          <a:blip r:embed="rId3"/>
           <a:stretch>
             <a:fillRect/>
           </a:stretch>
         </p:blipFill>
         <p:spPr>
           <a:xfrm>
-            <a:off x="24458801" y="12292071"/>
-            <a:ext cx="3889791" cy="3122920"/>
+            <a:off x="15567286" y="8338534"/>
+            <a:ext cx="11165266" cy="3183765"/>
           </a:xfrm>
           <a:prstGeom prst="rect">
             <a:avLst/>
           </a:prstGeom>
         </p:spPr>
       </p:pic>
-      <p:pic>
-        <p:nvPicPr>
-          <p:cNvPr id="14361" name="Picture 14360"/>
-          <p:cNvPicPr>
-            <a:picLocks noChangeAspect="1"/>
-          </p:cNvPicPr>
-          <p:nvPr/>
-        </p:nvPicPr>
-        <p:blipFill>
-          <a:blip r:embed="rId4"/>
-          <a:stretch>
-            <a:fillRect/>
-          </a:stretch>
-        </p:blipFill>
-        <p:spPr>
-          <a:xfrm>
-            <a:off x="17717229" y="12211353"/>
-            <a:ext cx="3889791" cy="3122920"/>
-          </a:xfrm>
-          <a:prstGeom prst="rect">
-            <a:avLst/>
-          </a:prstGeom>
-        </p:spPr>
-      </p:pic>
-      <p:sp>
-        <p:nvSpPr>
-          <p:cNvPr id="24" name="TextBox 23"/>
-          <p:cNvSpPr txBox="1"/>
-          <p:nvPr/>
-        </p:nvSpPr>
-        <p:spPr>
-          <a:xfrm>
-            <a:off x="507838" y="17453659"/>
-            <a:ext cx="13572000" cy="3416320"/>
-          </a:xfrm>
-          <a:prstGeom prst="rect">
-            <a:avLst/>
-          </a:prstGeom>
-          <a:solidFill>
-            <a:schemeClr val="bg1"/>
-          </a:solidFill>
-          <a:ln w="76200">
-            <a:solidFill>
-              <a:schemeClr val="bg1">
-                <a:lumMod val="50000"/>
-              </a:schemeClr>
-            </a:solidFill>
-          </a:ln>
-        </p:spPr>
-        <p:txBody>
-          <a:bodyPr wrap="square" rtlCol="0">
-            <a:spAutoFit/>
-          </a:bodyPr>
-          <a:lstStyle/>
-          <a:p>
-            <a:pPr algn="ctr"/>
-            <a:r>
-              <a:rPr lang="en-CA" dirty="0">
-                <a:solidFill>
-                  <a:schemeClr val="bg1">
-                    <a:lumMod val="50000"/>
-                  </a:schemeClr>
-                </a:solidFill>
-              </a:rPr>
-              <a:t>Insert a Diagram or image to help explain your methods</a:t>
-            </a:r>
-          </a:p>
-          <a:p>
-            <a:pPr algn="ctr"/>
-            <a:r>
-              <a:rPr lang="en-CA" dirty="0">
-                <a:solidFill>
-                  <a:schemeClr val="bg1">
-                    <a:lumMod val="50000"/>
-                  </a:schemeClr>
-                </a:solidFill>
-              </a:rPr>
-              <a:t>Use a letter system to label separate panels</a:t>
-            </a:r>
-          </a:p>
-          <a:p>
-            <a:pPr algn="ctr"/>
-            <a:r>
-              <a:rPr lang="en-CA" dirty="0">
-                <a:solidFill>
-                  <a:schemeClr val="bg1">
-                    <a:lumMod val="50000"/>
-                  </a:schemeClr>
-                </a:solidFill>
-              </a:rPr>
-              <a:t>Use arrows to direct viewers to important details</a:t>
-            </a:r>
-          </a:p>
-          <a:p>
-            <a:pPr algn="ctr"/>
-            <a:endParaRPr lang="en-CA" dirty="0">
-              <a:solidFill>
-                <a:schemeClr val="bg1">
-                  <a:lumMod val="50000"/>
-                </a:schemeClr>
-              </a:solidFill>
-            </a:endParaRPr>
-          </a:p>
-          <a:p>
-            <a:pPr algn="ctr"/>
-            <a:endParaRPr lang="en-CA" dirty="0">
-              <a:solidFill>
-                <a:schemeClr val="bg1">
-                  <a:lumMod val="50000"/>
-                </a:schemeClr>
-              </a:solidFill>
-            </a:endParaRPr>
-          </a:p>
-          <a:p>
-            <a:pPr algn="ctr"/>
-            <a:endParaRPr lang="en-CA" dirty="0">
-              <a:solidFill>
-                <a:schemeClr val="bg1">
-                  <a:lumMod val="50000"/>
-                </a:schemeClr>
-              </a:solidFill>
-            </a:endParaRPr>
-          </a:p>
-          <a:p>
-            <a:pPr algn="ctr"/>
-            <a:endParaRPr lang="en-CA" dirty="0">
-              <a:solidFill>
-                <a:schemeClr val="bg1">
-                  <a:lumMod val="50000"/>
-                </a:schemeClr>
-              </a:solidFill>
-            </a:endParaRPr>
-          </a:p>
-          <a:p>
-            <a:pPr algn="ctr"/>
-            <a:endParaRPr lang="en-CA" dirty="0">
-              <a:solidFill>
-                <a:schemeClr val="bg1">
-                  <a:lumMod val="50000"/>
-                </a:schemeClr>
-              </a:solidFill>
-            </a:endParaRPr>
-          </a:p>
-          <a:p>
-            <a:pPr algn="ctr"/>
-            <a:endParaRPr lang="en-CA" dirty="0">
-              <a:solidFill>
-                <a:schemeClr val="bg1">
-                  <a:lumMod val="50000"/>
-                </a:schemeClr>
-              </a:solidFill>
-            </a:endParaRPr>
-          </a:p>
-        </p:txBody>
-      </p:sp>
       <p:sp>
         <p:nvSpPr>
           <p:cNvPr id="14341" name="Rectangle 12"/>
@@ -4608,7 +4150,7 @@
         </p:nvSpPr>
         <p:spPr bwMode="auto">
           <a:xfrm>
-            <a:off x="37715176" y="24543683"/>
+            <a:off x="37929038" y="16119237"/>
             <a:ext cx="4285744" cy="885589"/>
           </a:xfrm>
           <a:prstGeom prst="rect">
@@ -4674,8 +4216,8 @@
         </p:nvSpPr>
         <p:spPr bwMode="auto">
           <a:xfrm>
-            <a:off x="501752" y="12544344"/>
-            <a:ext cx="9649072" cy="4523439"/>
+            <a:off x="456583" y="12463652"/>
+            <a:ext cx="13619772" cy="4170907"/>
           </a:xfrm>
           <a:prstGeom prst="rect">
             <a:avLst/>
@@ -4710,81 +4252,6 @@
           </a:bodyPr>
           <a:lstStyle/>
           <a:p>
-            <a:pPr marL="339677" indent="-339677" algn="just">
-              <a:lnSpc>
-                <a:spcPct val="130000"/>
-              </a:lnSpc>
-              <a:spcAft>
-                <a:spcPts val="600"/>
-              </a:spcAft>
-              <a:buFont typeface="Arial"/>
-              <a:buChar char="•"/>
-            </a:pPr>
-            <a:r>
-              <a:rPr sz="2200" b="0" i="0" dirty="0">
-                <a:solidFill>
-                  <a:srgbClr val="1C222B"/>
-                </a:solidFill>
-                <a:latin typeface="Calibri"/>
-              </a:rPr>
-              <a:t>Dataset: 149,662 labelled epochs across 4 cities and 9+ receiver types. Hangzhou (Beihang campus, Scenarios A to E, </a:t>
-            </a:r>
-            <a:r>
-              <a:rPr sz="2200" b="0" i="0" dirty="0" err="1">
-                <a:solidFill>
-                  <a:srgbClr val="1C222B"/>
-                </a:solidFill>
-                <a:latin typeface="Calibri"/>
-              </a:rPr>
-              <a:t>Septentrio</a:t>
-            </a:r>
-            <a:r>
-              <a:rPr sz="2200" b="0" i="0" dirty="0">
-                <a:solidFill>
-                  <a:srgbClr val="1C222B"/>
-                </a:solidFill>
-                <a:latin typeface="Calibri"/>
-              </a:rPr>
-              <a:t> Mosaic-X5C); Hong Kong (</a:t>
-            </a:r>
-            <a:r>
-              <a:rPr sz="2200" b="0" i="0" dirty="0" err="1">
-                <a:solidFill>
-                  <a:srgbClr val="1C222B"/>
-                </a:solidFill>
-                <a:latin typeface="Calibri"/>
-              </a:rPr>
-              <a:t>UrbanNav</a:t>
-            </a:r>
-            <a:r>
-              <a:rPr sz="2200" b="0" i="0" dirty="0">
-                <a:solidFill>
-                  <a:srgbClr val="1C222B"/>
-                </a:solidFill>
-                <a:latin typeface="Calibri"/>
-              </a:rPr>
-              <a:t>: Medium, Deep, Harsh, Tunnel); Tokyo held-out (Shinjuku Trimble, Shinjuku u-</a:t>
-            </a:r>
-            <a:r>
-              <a:rPr sz="2200" b="0" i="0" dirty="0" err="1">
-                <a:solidFill>
-                  <a:srgbClr val="1C222B"/>
-                </a:solidFill>
-                <a:latin typeface="Calibri"/>
-              </a:rPr>
-              <a:t>blox</a:t>
-            </a:r>
-            <a:r>
-              <a:rPr sz="2200" b="0" i="0" dirty="0">
-                <a:solidFill>
-                  <a:srgbClr val="1C222B"/>
-                </a:solidFill>
-                <a:latin typeface="Calibri"/>
-              </a:rPr>
-              <a:t> F9P, Odaiba).</a:t>
-            </a:r>
-          </a:p>
-          <a:p>
             <a:pPr algn="just">
               <a:lnSpc>
                 <a:spcPct val="130000"/>
@@ -4794,13 +4261,22 @@
               </a:spcAft>
             </a:pPr>
             <a:r>
+              <a:rPr sz="2200" b="1" i="0" dirty="0">
+                <a:solidFill>
+                  <a:srgbClr val="1C222B"/>
+                </a:solidFill>
+                <a:latin typeface="Calibri"/>
+              </a:rPr>
+              <a:t>Dataset</a:t>
+            </a:r>
+            <a:r>
               <a:rPr sz="2200" b="0" i="0" dirty="0">
                 <a:solidFill>
                   <a:srgbClr val="1C222B"/>
                 </a:solidFill>
                 <a:latin typeface="Calibri"/>
               </a:rPr>
-              <a:t>Features: 37 features in 7 groups, position quality, signal strength, satellite geometry, pseudorange residuals, temporal patterns, atmospheric delays, and receiver status. The </a:t>
+              <a:t>: 149,662 labelled epochs across 4 cities and 9+ receiver types. Hangzhou (Beihang campus, Scenarios A to E, </a:t>
             </a:r>
             <a:r>
               <a:rPr sz="2200" b="0" i="0" dirty="0" err="1">
@@ -4809,7 +4285,7 @@
                 </a:solidFill>
                 <a:latin typeface="Calibri"/>
               </a:rPr>
-              <a:t>receiver_tier</a:t>
+              <a:t>Septentrio</a:t>
             </a:r>
             <a:r>
               <a:rPr sz="2200" b="0" i="0" dirty="0">
@@ -4818,7 +4294,7 @@
                 </a:solidFill>
                 <a:latin typeface="Calibri"/>
               </a:rPr>
-              <a:t> feature encodes hardware class so one model handles </a:t>
+              <a:t> Mosaic-X5C); Hong Kong (</a:t>
             </a:r>
             <a:r>
               <a:rPr sz="2200" b="0" i="0" dirty="0" err="1">
@@ -4827,7 +4303,7 @@
                 </a:solidFill>
                 <a:latin typeface="Calibri"/>
               </a:rPr>
-              <a:t>Septentrio</a:t>
+              <a:t>UrbanNav</a:t>
             </a:r>
             <a:r>
               <a:rPr sz="2200" b="0" i="0" dirty="0">
@@ -4836,7 +4312,7 @@
                 </a:solidFill>
                 <a:latin typeface="Calibri"/>
               </a:rPr>
-              <a:t> (48 dB-Hz) and u-</a:t>
+              <a:t>: Medium, Deep, Harsh, Tunnel); Tokyo held-out (Shinjuku Trimble, Shinjuku u-</a:t>
             </a:r>
             <a:r>
               <a:rPr sz="2200" b="0" i="0" dirty="0" err="1">
@@ -4854,7 +4330,7 @@
                 </a:solidFill>
                 <a:latin typeface="Calibri"/>
               </a:rPr>
-              <a:t> (38 dB-Hz) identically.</a:t>
+              <a:t> F9P, Odaiba).</a:t>
             </a:r>
           </a:p>
           <a:p>
@@ -4867,13 +4343,40 @@
               </a:spcAft>
             </a:pPr>
             <a:r>
+              <a:rPr sz="2200" b="1" i="0" dirty="0">
+                <a:solidFill>
+                  <a:srgbClr val="1C222B"/>
+                </a:solidFill>
+                <a:latin typeface="Calibri"/>
+              </a:rPr>
+              <a:t>Features</a:t>
+            </a:r>
+            <a:r>
               <a:rPr sz="2200" b="0" i="0" dirty="0">
                 <a:solidFill>
                   <a:srgbClr val="1C222B"/>
                 </a:solidFill>
                 <a:latin typeface="Calibri"/>
               </a:rPr>
-              <a:t>Model: a hybrid Transformer-LSTM. The Transformer (2 layers, 8 heads, </a:t>
+              <a:t>: 3</a:t>
+            </a:r>
+            <a:r>
+              <a:rPr lang="en-US" sz="2200" b="0" i="0" dirty="0">
+                <a:solidFill>
+                  <a:srgbClr val="1C222B"/>
+                </a:solidFill>
+                <a:latin typeface="Calibri"/>
+              </a:rPr>
+              <a:t>4</a:t>
+            </a:r>
+            <a:r>
+              <a:rPr sz="2200" b="0" i="0" dirty="0">
+                <a:solidFill>
+                  <a:srgbClr val="1C222B"/>
+                </a:solidFill>
+                <a:latin typeface="Calibri"/>
+              </a:rPr>
+              <a:t> features in 7 groups, position quality, signal strength, satellite geometry, pseudorange residuals, temporal patterns, atmospheric delays, and receiver status. The </a:t>
             </a:r>
             <a:r>
               <a:rPr sz="2200" b="0" i="0" dirty="0" err="1">
@@ -4882,6 +4385,88 @@
                 </a:solidFill>
                 <a:latin typeface="Calibri"/>
               </a:rPr>
+              <a:t>receiver_tier</a:t>
+            </a:r>
+            <a:r>
+              <a:rPr sz="2200" b="0" i="0" dirty="0">
+                <a:solidFill>
+                  <a:srgbClr val="1C222B"/>
+                </a:solidFill>
+                <a:latin typeface="Calibri"/>
+              </a:rPr>
+              <a:t> feature encodes hardware class so one model handles </a:t>
+            </a:r>
+            <a:r>
+              <a:rPr sz="2200" b="0" i="0" dirty="0" err="1">
+                <a:solidFill>
+                  <a:srgbClr val="1C222B"/>
+                </a:solidFill>
+                <a:latin typeface="Calibri"/>
+              </a:rPr>
+              <a:t>Septentrio</a:t>
+            </a:r>
+            <a:r>
+              <a:rPr sz="2200" b="0" i="0" dirty="0">
+                <a:solidFill>
+                  <a:srgbClr val="1C222B"/>
+                </a:solidFill>
+                <a:latin typeface="Calibri"/>
+              </a:rPr>
+              <a:t> (48 dB-Hz) and u-</a:t>
+            </a:r>
+            <a:r>
+              <a:rPr sz="2200" b="0" i="0" dirty="0" err="1">
+                <a:solidFill>
+                  <a:srgbClr val="1C222B"/>
+                </a:solidFill>
+                <a:latin typeface="Calibri"/>
+              </a:rPr>
+              <a:t>blox</a:t>
+            </a:r>
+            <a:r>
+              <a:rPr sz="2200" b="0" i="0" dirty="0">
+                <a:solidFill>
+                  <a:srgbClr val="1C222B"/>
+                </a:solidFill>
+                <a:latin typeface="Calibri"/>
+              </a:rPr>
+              <a:t> (38 dB-Hz) identically.</a:t>
+            </a:r>
+          </a:p>
+          <a:p>
+            <a:pPr algn="just">
+              <a:lnSpc>
+                <a:spcPct val="130000"/>
+              </a:lnSpc>
+              <a:spcAft>
+                <a:spcPts val="600"/>
+              </a:spcAft>
+            </a:pPr>
+            <a:r>
+              <a:rPr sz="2200" b="1" i="0" dirty="0">
+                <a:solidFill>
+                  <a:srgbClr val="1C222B"/>
+                </a:solidFill>
+                <a:latin typeface="Calibri"/>
+              </a:rPr>
+              <a:t>Model</a:t>
+            </a:r>
+            <a:r>
+              <a:rPr sz="2200" b="0" i="0" dirty="0">
+                <a:solidFill>
+                  <a:srgbClr val="1C222B"/>
+                </a:solidFill>
+                <a:latin typeface="Calibri"/>
+              </a:rPr>
+              <a:t>: a hybrid Transformer-LSTM. The Transformer (2 layers, 8 heads, </a:t>
+            </a:r>
+            <a:r>
+              <a:rPr sz="2200" b="0" i="0" dirty="0" err="1">
+                <a:solidFill>
+                  <a:srgbClr val="1C222B"/>
+                </a:solidFill>
+                <a:latin typeface="Calibri"/>
+              </a:rPr>
               <a:t>d_model</a:t>
             </a:r>
             <a:r>
@@ -4916,7 +4501,7 @@
       </p:sp>
       <p:sp>
         <p:nvSpPr>
-          <p:cNvPr id="14345" name="Rectangle 62"/>
+          <p:cNvPr id="14346" name="Rectangle 102"/>
           <p:cNvSpPr>
             <a:spLocks noChangeArrowheads="1"/>
           </p:cNvSpPr>
@@ -4924,8 +4509,8 @@
         </p:nvSpPr>
         <p:spPr bwMode="auto">
           <a:xfrm>
-            <a:off x="29444659" y="30632400"/>
-            <a:ext cx="5263497" cy="645462"/>
+            <a:off x="28935866" y="13768732"/>
+            <a:ext cx="13527962" cy="2612596"/>
           </a:xfrm>
           <a:prstGeom prst="rect">
             <a:avLst/>
@@ -4955,59 +4540,6 @@
           </a:extLst>
         </p:spPr>
         <p:txBody>
-          <a:bodyPr wrap="none" lIns="90580" tIns="45290" rIns="90580" bIns="45290">
-            <a:spAutoFit/>
-          </a:bodyPr>
-          <a:lstStyle/>
-          <a:p>
-            <a:r>
-              <a:rPr lang="en-US" sz="3600" dirty="0"/>
-              <a:t>This work was funded by</a:t>
-            </a:r>
-          </a:p>
-        </p:txBody>
-      </p:sp>
-      <p:sp>
-        <p:nvSpPr>
-          <p:cNvPr id="14346" name="Rectangle 102"/>
-          <p:cNvSpPr>
-            <a:spLocks noChangeArrowheads="1"/>
-          </p:cNvSpPr>
-          <p:nvPr/>
-        </p:nvSpPr>
-        <p:spPr bwMode="auto">
-          <a:xfrm>
-            <a:off x="28812665" y="14042579"/>
-            <a:ext cx="13527962" cy="7939759"/>
-          </a:xfrm>
-          <a:prstGeom prst="rect">
-            <a:avLst/>
-          </a:prstGeom>
-          <a:noFill/>
-          <a:ln>
-            <a:noFill/>
-          </a:ln>
-          <a:extLst>
-            <a:ext uri="{909E8E84-426E-40dd-AFC4-6F175D3DCCD1}">
-              <a14:hiddenFill xmlns="" xmlns:a14="http://schemas.microsoft.com/office/drawing/2010/main">
-                <a:solidFill>
-                  <a:srgbClr val="FFFFFF"/>
-                </a:solidFill>
-              </a14:hiddenFill>
-            </a:ext>
-            <a:ext uri="{91240B29-F687-4f45-9708-019B960494DF}">
-              <a14:hiddenLine xmlns="" xmlns:a14="http://schemas.microsoft.com/office/drawing/2010/main" w="9525">
-                <a:solidFill>
-                  <a:srgbClr val="000000"/>
-                </a:solidFill>
-                <a:miter lim="800000"/>
-                <a:headEnd/>
-                <a:tailEnd/>
-              </a14:hiddenLine>
-            </a:ext>
-          </a:extLst>
-        </p:spPr>
-        <p:txBody>
           <a:bodyPr wrap="square" lIns="90572" tIns="45286" rIns="90572" bIns="45286" anchor="t">
             <a:spAutoFit/>
           </a:bodyPr>
@@ -5024,7 +4556,7 @@
               <a:buChar char="•"/>
             </a:pPr>
             <a:r>
-              <a:rPr sz="1600" b="1">
+              <a:rPr sz="1600" b="1" dirty="0">
                 <a:solidFill>
                   <a:srgbClr val="102A43"/>
                 </a:solidFill>
@@ -5043,13 +4575,31 @@
               </a:spcAft>
             </a:pPr>
             <a:r>
-              <a:rPr sz="1600" b="0">
+              <a:rPr sz="1600" b="0" dirty="0">
                 <a:solidFill>
                   <a:srgbClr val="102A43"/>
                 </a:solidFill>
                 <a:latin typeface="Consolas"/>
               </a:rPr>
-              <a:t>Predict:   xp = f(x, u);   Pp = F P F^T + Q</a:t>
+              <a:t>Predict:   </a:t>
+            </a:r>
+            <a:r>
+              <a:rPr sz="1600" b="0" dirty="0" err="1">
+                <a:solidFill>
+                  <a:srgbClr val="102A43"/>
+                </a:solidFill>
+                <a:latin typeface="Consolas"/>
+              </a:rPr>
+              <a:t>xp</a:t>
+            </a:r>
+            <a:r>
+              <a:rPr sz="1600" b="0" dirty="0">
+                <a:solidFill>
+                  <a:srgbClr val="102A43"/>
+                </a:solidFill>
+                <a:latin typeface="Consolas"/>
+              </a:rPr>
+              <a:t> = f(x, u);   Pp = F P F^T + Q</a:t>
             </a:r>
           </a:p>
           <a:p>
@@ -5062,7 +4612,7 @@
               </a:spcAft>
             </a:pPr>
             <a:r>
-              <a:rPr sz="1600" b="0">
+              <a:rPr sz="1600" b="0" dirty="0">
                 <a:solidFill>
                   <a:srgbClr val="102A43"/>
                 </a:solidFill>
@@ -5081,13 +4631,49 @@
               </a:spcAft>
             </a:pPr>
             <a:r>
-              <a:rPr sz="1600" b="0">
+              <a:rPr sz="1600" b="0" dirty="0">
                 <a:solidFill>
                   <a:srgbClr val="102A43"/>
                 </a:solidFill>
                 <a:latin typeface="Consolas"/>
               </a:rPr>
-              <a:t>           x = xp + K (z - H xp)</a:t>
+              <a:t>           x = </a:t>
+            </a:r>
+            <a:r>
+              <a:rPr sz="1600" b="0" dirty="0" err="1">
+                <a:solidFill>
+                  <a:srgbClr val="102A43"/>
+                </a:solidFill>
+                <a:latin typeface="Consolas"/>
+              </a:rPr>
+              <a:t>xp</a:t>
+            </a:r>
+            <a:r>
+              <a:rPr sz="1600" b="0" dirty="0">
+                <a:solidFill>
+                  <a:srgbClr val="102A43"/>
+                </a:solidFill>
+                <a:latin typeface="Consolas"/>
+              </a:rPr>
+              <a:t> + K (z - H </a:t>
+            </a:r>
+            <a:r>
+              <a:rPr sz="1600" b="0" dirty="0" err="1">
+                <a:solidFill>
+                  <a:srgbClr val="102A43"/>
+                </a:solidFill>
+                <a:latin typeface="Consolas"/>
+              </a:rPr>
+              <a:t>xp</a:t>
+            </a:r>
+            <a:r>
+              <a:rPr sz="1600" b="0" dirty="0">
+                <a:solidFill>
+                  <a:srgbClr val="102A43"/>
+                </a:solidFill>
+                <a:latin typeface="Consolas"/>
+              </a:rPr>
+              <a:t>)</a:t>
             </a:r>
           </a:p>
           <a:p>
@@ -5100,7 +4686,7 @@
               </a:spcAft>
             </a:pPr>
             <a:r>
-              <a:rPr sz="1600" b="0">
+              <a:rPr sz="1600" b="0" dirty="0">
                 <a:solidFill>
                   <a:srgbClr val="102A43"/>
                 </a:solidFill>
@@ -5119,7 +4705,7 @@
               </a:spcAft>
             </a:pPr>
             <a:r>
-              <a:rPr sz="1600" b="0">
+              <a:rPr sz="1600" b="0" dirty="0">
                 <a:solidFill>
                   <a:srgbClr val="102A43"/>
                 </a:solidFill>
@@ -5127,6 +4713,28 @@
               </a:rPr>
               <a:t>Adaptive:  R = (40 m)^2 I2 if P(DEGRADED) &gt; 0.45, else r_base^2 I2</a:t>
             </a:r>
+            <a:endParaRPr lang="en-US" sz="1600" b="0" dirty="0">
+              <a:solidFill>
+                <a:srgbClr val="102A43"/>
+              </a:solidFill>
+              <a:latin typeface="Consolas"/>
+            </a:endParaRPr>
+          </a:p>
+          <a:p>
+            <a:pPr algn="l">
+              <a:lnSpc>
+                <a:spcPct val="130000"/>
+              </a:lnSpc>
+              <a:spcAft>
+                <a:spcPts val="400"/>
+              </a:spcAft>
+            </a:pPr>
+            <a:endParaRPr sz="1600" b="0" dirty="0">
+              <a:solidFill>
+                <a:srgbClr val="102A43"/>
+              </a:solidFill>
+              <a:latin typeface="Consolas"/>
+            </a:endParaRPr>
           </a:p>
         </p:txBody>
       </p:sp>
@@ -5421,7 +5029,7 @@
                   <a:srgbClr val="FFFFFF"/>
                 </a:solidFill>
               </a:rPr>
-              <a:t>Materials and Methods</a:t>
+              <a:t>Methodology</a:t>
             </a:r>
           </a:p>
         </p:txBody>
@@ -5584,7 +5192,7 @@
         </p:nvSpPr>
         <p:spPr bwMode="auto">
           <a:xfrm>
-            <a:off x="28875507" y="12890451"/>
+            <a:off x="28989704" y="12567327"/>
             <a:ext cx="13572000" cy="999405"/>
           </a:xfrm>
           <a:prstGeom prst="rect">
@@ -5712,7 +5320,7 @@
           <a:p>
             <a:pPr algn="ctr"/>
             <a:r>
-              <a:rPr sz="5900">
+              <a:rPr sz="5900" dirty="0">
                 <a:solidFill>
                   <a:srgbClr val="FFFFFF"/>
                 </a:solidFill>
@@ -5732,16 +5340,14 @@
         </p:nvSpPr>
         <p:spPr bwMode="auto">
           <a:xfrm>
-            <a:off x="504356" y="11882339"/>
-            <a:ext cx="13572000" cy="522352"/>
+            <a:off x="504355" y="11844063"/>
+            <a:ext cx="13572000" cy="459258"/>
           </a:xfrm>
           <a:prstGeom prst="rect">
             <a:avLst/>
           </a:prstGeom>
           <a:solidFill>
-            <a:schemeClr val="bg1">
-              <a:lumMod val="65000"/>
-            </a:schemeClr>
+            <a:srgbClr val="002060"/>
           </a:solidFill>
           <a:ln>
             <a:noFill/>
@@ -5753,7 +5359,7 @@
           </a:bodyPr>
           <a:lstStyle/>
           <a:p>
-            <a:pPr algn="l">
+            <a:pPr algn="ctr">
               <a:lnSpc>
                 <a:spcPct val="130000"/>
               </a:lnSpc>
@@ -5762,13 +5368,31 @@
               </a:spcAft>
             </a:pPr>
             <a:r>
-              <a:rPr sz="2600" b="1" i="0">
-                <a:solidFill>
-                  <a:srgbClr val="003366"/>
+              <a:rPr sz="2000" b="1" i="0" dirty="0">
+                <a:solidFill>
+                  <a:schemeClr val="bg1"/>
                 </a:solidFill>
                 <a:latin typeface="Calibri"/>
               </a:rPr>
-              <a:t>A unified pipeline turns raw multi-city GNSS into 37 engineered features and multi-horizon degradation labels.</a:t>
+              <a:t>A unified pipeline turns raw multi-city GNSS into 3</a:t>
+            </a:r>
+            <a:r>
+              <a:rPr lang="en-US" sz="2000" b="1" i="0" dirty="0">
+                <a:solidFill>
+                  <a:schemeClr val="bg1"/>
+                </a:solidFill>
+                <a:latin typeface="Calibri"/>
+              </a:rPr>
+              <a:t>4</a:t>
+            </a:r>
+            <a:r>
+              <a:rPr sz="2000" b="1" i="0" dirty="0">
+                <a:solidFill>
+                  <a:schemeClr val="bg1"/>
+                </a:solidFill>
+                <a:latin typeface="Calibri"/>
+              </a:rPr>
+              <a:t> engineered features and multi-horizon degradation labels.</a:t>
             </a:r>
           </a:p>
         </p:txBody>
@@ -5784,13 +5408,13 @@
         <p:spPr bwMode="auto">
           <a:xfrm>
             <a:off x="28989704" y="4321499"/>
-            <a:ext cx="13572000" cy="522352"/>
+            <a:ext cx="13572000" cy="459258"/>
           </a:xfrm>
           <a:prstGeom prst="rect">
             <a:avLst/>
           </a:prstGeom>
           <a:solidFill>
-            <a:srgbClr val="637F26"/>
+            <a:srgbClr val="002060"/>
           </a:solidFill>
           <a:ln>
             <a:noFill/>
@@ -5802,7 +5426,7 @@
           </a:bodyPr>
           <a:lstStyle/>
           <a:p>
-            <a:pPr algn="l">
+            <a:pPr algn="ctr">
               <a:lnSpc>
                 <a:spcPct val="130000"/>
               </a:lnSpc>
@@ -5811,13 +5435,13 @@
               </a:spcAft>
             </a:pPr>
             <a:r>
-              <a:rPr sz="2600" b="1" i="0">
-                <a:solidFill>
-                  <a:srgbClr val="003366"/>
+              <a:rPr sz="2000" b="1" i="0" dirty="0">
+                <a:solidFill>
+                  <a:schemeClr val="bg1"/>
                 </a:solidFill>
                 <a:latin typeface="Calibri"/>
               </a:rPr>
-              <a:t>Cross-city zero-shot: SENTINEL holds DEGRADED F1 = 0.75 on unseen Tokyo while Random Forest collapses to 0.15, a 5x generalisation gap.</a:t>
+              <a:t>Cross-city zero-shot: SENTINEL holds DEGRADED F1 = 0.75 on unseen Tokyo while Random Forest collapses to 0.15</a:t>
             </a:r>
           </a:p>
         </p:txBody>
@@ -5832,14 +5456,14 @@
         </p:nvSpPr>
         <p:spPr bwMode="auto">
           <a:xfrm>
-            <a:off x="14761940" y="10945019"/>
-            <a:ext cx="13572000" cy="522352"/>
+            <a:off x="14647235" y="12001315"/>
+            <a:ext cx="13572000" cy="459258"/>
           </a:xfrm>
           <a:prstGeom prst="rect">
             <a:avLst/>
           </a:prstGeom>
           <a:solidFill>
-            <a:srgbClr val="637F26"/>
+            <a:srgbClr val="002060"/>
           </a:solidFill>
           <a:ln>
             <a:noFill/>
@@ -5851,7 +5475,7 @@
           </a:bodyPr>
           <a:lstStyle/>
           <a:p>
-            <a:pPr algn="l">
+            <a:pPr algn="ctr">
               <a:lnSpc>
                 <a:spcPct val="130000"/>
               </a:lnSpc>
@@ -5860,9 +5484,9 @@
               </a:spcAft>
             </a:pPr>
             <a:r>
-              <a:rPr sz="2600" b="1" i="0">
-                <a:solidFill>
-                  <a:srgbClr val="003366"/>
+              <a:rPr sz="2000" b="1" i="0" dirty="0">
+                <a:solidFill>
+                  <a:schemeClr val="bg1"/>
                 </a:solidFill>
                 <a:latin typeface="Calibri"/>
               </a:rPr>
@@ -5881,8 +5505,8 @@
         </p:nvSpPr>
         <p:spPr bwMode="auto">
           <a:xfrm>
-            <a:off x="14761940" y="15914787"/>
-            <a:ext cx="13572000" cy="707018"/>
+            <a:off x="21102906" y="16143172"/>
+            <a:ext cx="6912725" cy="645462"/>
           </a:xfrm>
           <a:prstGeom prst="rect">
             <a:avLst/>
@@ -6024,24 +5648,21 @@
             </a:lvl9pPr>
           </a:lstStyle>
           <a:p>
-            <a:pPr algn="l">
-              <a:lnSpc>
-                <a:spcPct val="130000"/>
-              </a:lnSpc>
+            <a:pPr algn="ctr">
               <a:spcAft>
                 <a:spcPts val="600"/>
               </a:spcAft>
             </a:pPr>
             <a:r>
-              <a:rPr sz="2000" b="0" i="1">
+              <a:rPr sz="1800" b="0" i="1" dirty="0">
                 <a:solidFill>
                   <a:srgbClr val="444A52"/>
                 </a:solidFill>
                 <a:latin typeface="Calibri"/>
               </a:rPr>
-              <a:t>Fig. 5: Macro-F1 and MCC across prediction horizons with bootstrap 95% CI. Performance degrades gracefully as the horizon extends.</a:t>
-            </a:r>
-            <a:endParaRPr lang="en-US" sz="2000" baseline="30000" dirty="0"/>
+              <a:t>Macro-F1 and MCC across prediction horizons with bootstrap 95% CI. Performance degrades gracefully as the horizon extends.</a:t>
+            </a:r>
+            <a:endParaRPr lang="en-US" sz="1800" baseline="30000" dirty="0"/>
           </a:p>
         </p:txBody>
       </p:sp>
@@ -6147,14 +5768,14 @@
         </p:nvSpPr>
         <p:spPr bwMode="auto">
           <a:xfrm>
-            <a:off x="432348" y="23619643"/>
-            <a:ext cx="13572000" cy="522352"/>
+            <a:off x="469860" y="26474741"/>
+            <a:ext cx="13572000" cy="457270"/>
           </a:xfrm>
           <a:prstGeom prst="rect">
             <a:avLst/>
           </a:prstGeom>
           <a:solidFill>
-            <a:srgbClr val="A6A6A6"/>
+            <a:srgbClr val="002060"/>
           </a:solidFill>
           <a:ln>
             <a:noFill/>
@@ -6166,7 +5787,7 @@
           </a:bodyPr>
           <a:lstStyle/>
           <a:p>
-            <a:pPr algn="l">
+            <a:pPr algn="ctr">
               <a:lnSpc>
                 <a:spcPct val="130000"/>
               </a:lnSpc>
@@ -6175,15 +5796,19 @@
               </a:spcAft>
             </a:pPr>
             <a:r>
-              <a:rPr sz="2600" b="1" i="0">
-                <a:solidFill>
-                  <a:srgbClr val="003366"/>
+              <a:rPr sz="2000" b="1" i="0" dirty="0">
+                <a:solidFill>
+                  <a:schemeClr val="bg1"/>
                 </a:solidFill>
                 <a:latin typeface="Calibri"/>
               </a:rPr>
               <a:t>Dataset composition across four cities, with Tokyo strictly held out.</a:t>
             </a:r>
-            <a:endParaRPr lang="en-GB" sz="2800" dirty="0"/>
+            <a:endParaRPr lang="en-GB" sz="2000" dirty="0">
+              <a:solidFill>
+                <a:schemeClr val="bg1"/>
+              </a:solidFill>
+            </a:endParaRPr>
           </a:p>
         </p:txBody>
       </p:sp>
@@ -6197,14 +5822,14 @@
         </p:nvSpPr>
         <p:spPr bwMode="auto">
           <a:xfrm>
-            <a:off x="504356" y="16472555"/>
-            <a:ext cx="13572000" cy="522352"/>
+            <a:off x="469860" y="20897234"/>
+            <a:ext cx="13572000" cy="459258"/>
           </a:xfrm>
           <a:prstGeom prst="rect">
             <a:avLst/>
           </a:prstGeom>
           <a:solidFill>
-            <a:srgbClr val="A6A6A6"/>
+            <a:srgbClr val="002060"/>
           </a:solidFill>
           <a:ln>
             <a:noFill/>
@@ -6216,7 +5841,7 @@
           </a:bodyPr>
           <a:lstStyle/>
           <a:p>
-            <a:pPr algn="l">
+            <a:pPr algn="ctr">
               <a:lnSpc>
                 <a:spcPct val="130000"/>
               </a:lnSpc>
@@ -6225,28 +5850,33 @@
               </a:spcAft>
             </a:pPr>
             <a:r>
-              <a:rPr sz="2600" b="1" i="0">
-                <a:solidFill>
-                  <a:srgbClr val="003366"/>
+              <a:rPr sz="2000" b="1" i="0" dirty="0">
+                <a:solidFill>
+                  <a:schemeClr val="bg1"/>
                 </a:solidFill>
                 <a:latin typeface="Calibri"/>
               </a:rPr>
               <a:t>Classification performance across all horizons on the held-out test set.</a:t>
             </a:r>
-            <a:endParaRPr lang="en-GB" sz="2800" dirty="0"/>
-          </a:p>
-        </p:txBody>
-      </p:sp>
-      <p:sp>
-        <p:nvSpPr>
-          <p:cNvPr id="3" name="TextBox 2"/>
+            <a:endParaRPr lang="en-US" sz="2000" b="1" i="0" dirty="0">
+              <a:solidFill>
+                <a:schemeClr val="bg1"/>
+              </a:solidFill>
+              <a:latin typeface="Calibri"/>
+            </a:endParaRPr>
+          </a:p>
+        </p:txBody>
+      </p:sp>
+      <p:sp>
+        <p:nvSpPr>
+          <p:cNvPr id="35" name="TextBox 34"/>
           <p:cNvSpPr txBox="1"/>
           <p:nvPr/>
         </p:nvSpPr>
         <p:spPr>
           <a:xfrm>
-            <a:off x="541868" y="29092251"/>
-            <a:ext cx="13745632" cy="830997"/>
+            <a:off x="747646" y="25174563"/>
+            <a:ext cx="13572000" cy="860235"/>
           </a:xfrm>
           <a:prstGeom prst="rect">
             <a:avLst/>
@@ -6259,69 +5889,40 @@
           </a:bodyPr>
           <a:lstStyle/>
           <a:p>
-            <a:pPr marL="339677" indent="-339677" algn="l">
+            <a:pPr algn="ctr">
               <a:lnSpc>
                 <a:spcPct val="130000"/>
               </a:lnSpc>
               <a:spcAft>
                 <a:spcPts val="600"/>
               </a:spcAft>
-              <a:buFont typeface="Arial"/>
-              <a:buChar char="•"/>
             </a:pPr>
             <a:r>
-              <a:rPr sz="2000" b="0" i="1">
+              <a:rPr sz="2000" b="0" i="1" dirty="0">
                 <a:solidFill>
                   <a:srgbClr val="444A52"/>
                 </a:solidFill>
                 <a:latin typeface="Calibri"/>
               </a:rPr>
-              <a:t>Fig. 1: Reactive monitoring gives 0 s warning. SENTINEL emits CLEAN, WARNING, and DEGRADED labels 30, 15, and 5 s before blockage, enabling pre-emptive fusion decisions.</a:t>
-            </a:r>
-            <a:endParaRPr lang="en-GB" dirty="0"/>
-          </a:p>
-        </p:txBody>
-      </p:sp>
-      <p:sp>
-        <p:nvSpPr>
-          <p:cNvPr id="35" name="TextBox 34"/>
-          <p:cNvSpPr txBox="1"/>
-          <p:nvPr/>
-        </p:nvSpPr>
-        <p:spPr>
-          <a:xfrm>
-            <a:off x="404244" y="21141168"/>
-            <a:ext cx="13572000" cy="1200329"/>
-          </a:xfrm>
-          <a:prstGeom prst="rect">
-            <a:avLst/>
-          </a:prstGeom>
-          <a:noFill/>
-        </p:spPr>
-        <p:txBody>
-          <a:bodyPr wrap="square" rtlCol="0">
-            <a:spAutoFit/>
-          </a:bodyPr>
-          <a:lstStyle/>
-          <a:p>
-            <a:pPr marL="342900" indent="-342900" algn="l">
-              <a:lnSpc>
-                <a:spcPct val="130000"/>
-              </a:lnSpc>
-              <a:spcAft>
-                <a:spcPts val="600"/>
-              </a:spcAft>
-              <a:buFont typeface="Arial"/>
-              <a:buChar char="•"/>
-            </a:pPr>
-            <a:r>
-              <a:rPr sz="2000" b="0" i="1">
+              <a:t>Row-</a:t>
+            </a:r>
+            <a:r>
+              <a:rPr sz="2000" b="0" i="1" dirty="0" err="1">
                 <a:solidFill>
                   <a:srgbClr val="444A52"/>
                 </a:solidFill>
                 <a:latin typeface="Calibri"/>
               </a:rPr>
-              <a:t>Fig. 3: Row-normalised confusion matrices (+5 s, +15 s, +30 s). CLEAN recall stays above 0.97 at all horizons; DEGRADED recall falls from 0.85 to 0.73 as the horizon extends.</a:t>
+              <a:t>normalised</a:t>
+            </a:r>
+            <a:r>
+              <a:rPr sz="2000" b="0" i="1" dirty="0">
+                <a:solidFill>
+                  <a:srgbClr val="444A52"/>
+                </a:solidFill>
+                <a:latin typeface="Calibri"/>
+              </a:rPr>
+              <a:t> confusion matrices (+5 s, +15 s, +30 s). CLEAN recall stays above 0.97 at all horizons; DEGRADED recall falls from 0.85 to 0.73 as the horizon extends.</a:t>
             </a:r>
           </a:p>
         </p:txBody>
@@ -6336,7 +5937,7 @@
         </p:nvSpPr>
         <p:spPr bwMode="auto">
           <a:xfrm>
-            <a:off x="28886001" y="22440650"/>
+            <a:off x="28768627" y="26846393"/>
             <a:ext cx="13572000" cy="999405"/>
           </a:xfrm>
           <a:prstGeom prst="rect">
@@ -6484,7 +6085,7 @@
         </p:nvSpPr>
         <p:spPr bwMode="auto">
           <a:xfrm>
-            <a:off x="28875507" y="28346400"/>
+            <a:off x="28875507" y="29988195"/>
             <a:ext cx="13572000" cy="999405"/>
           </a:xfrm>
           <a:prstGeom prst="rect">
@@ -6630,8 +6231,8 @@
         </p:nvSpPr>
         <p:spPr>
           <a:xfrm>
-            <a:off x="28875508" y="29443680"/>
-            <a:ext cx="13572000" cy="1200329"/>
+            <a:off x="28768627" y="31325882"/>
+            <a:ext cx="13572000" cy="937051"/>
           </a:xfrm>
           <a:prstGeom prst="rect">
             <a:avLst/>
@@ -6653,27 +6254,27 @@
               </a:spcAft>
             </a:pPr>
             <a:r>
-              <a:rPr sz="2200" b="0" i="0">
+              <a:rPr sz="2200" b="0" i="0" dirty="0">
                 <a:solidFill>
                   <a:srgbClr val="1C222B"/>
                 </a:solidFill>
                 <a:latin typeface="Calibri"/>
               </a:rPr>
-              <a:t>We thank our supervisor Dr. Ahmed Wasiu and the H3I and RCSSTEAP programme at Beihang University for guidance, equipment, and field-collection support throughout the SENTINEL-GNSS pilot project.</a:t>
-            </a:r>
-          </a:p>
-        </p:txBody>
-      </p:sp>
-      <p:sp>
-        <p:nvSpPr>
-          <p:cNvPr id="46" name="TextBox 45"/>
+              <a:t>We thank our supervisor Dr. Ahmed Wasiu and RCSSTEAP program at Beihang University for guidance, equipment, and field-collection support throughout the SENTINEL-GNSS pilot project.</a:t>
+            </a:r>
+          </a:p>
+        </p:txBody>
+      </p:sp>
+      <p:sp>
+        <p:nvSpPr>
+          <p:cNvPr id="26" name="TextBox 25"/>
           <p:cNvSpPr txBox="1"/>
           <p:nvPr/>
         </p:nvSpPr>
         <p:spPr>
           <a:xfrm>
-            <a:off x="579380" y="20020984"/>
-            <a:ext cx="13462480" cy="646331"/>
+            <a:off x="347232" y="31781417"/>
+            <a:ext cx="13572000" cy="460126"/>
           </a:xfrm>
           <a:prstGeom prst="rect">
             <a:avLst/>
@@ -6686,40 +6287,7 @@
           </a:bodyPr>
           <a:lstStyle/>
           <a:p>
-            <a:r>
-              <a:rPr lang="en-US" sz="3600" dirty="0">
-                <a:solidFill>
-                  <a:srgbClr val="FFFFFF"/>
-                </a:solidFill>
-              </a:rPr>
-              <a:t>A 						B 					C</a:t>
-            </a:r>
-          </a:p>
-        </p:txBody>
-      </p:sp>
-      <p:sp>
-        <p:nvSpPr>
-          <p:cNvPr id="26" name="TextBox 25"/>
-          <p:cNvSpPr txBox="1"/>
-          <p:nvPr/>
-        </p:nvSpPr>
-        <p:spPr>
-          <a:xfrm>
-            <a:off x="469860" y="27218443"/>
-            <a:ext cx="13572000" cy="830997"/>
-          </a:xfrm>
-          <a:prstGeom prst="rect">
-            <a:avLst/>
-          </a:prstGeom>
-          <a:noFill/>
-        </p:spPr>
-        <p:txBody>
-          <a:bodyPr wrap="square" rtlCol="0">
-            <a:spAutoFit/>
-          </a:bodyPr>
-          <a:lstStyle/>
-          <a:p>
-            <a:pPr algn="l">
+            <a:pPr algn="ctr">
               <a:lnSpc>
                 <a:spcPct val="130000"/>
               </a:lnSpc>
@@ -6728,20 +6296,20 @@
               </a:spcAft>
             </a:pPr>
             <a:r>
-              <a:rPr sz="2000" b="0" i="1">
+              <a:rPr sz="2000" b="0" i="1" dirty="0">
                 <a:solidFill>
                   <a:srgbClr val="444A52"/>
                 </a:solidFill>
                 <a:latin typeface="Calibri"/>
               </a:rPr>
-              <a:t>Fig. 2: Dataset composition. Tokyo (49,868 epochs) is strictly held out and never seen during training or validation.</a:t>
-            </a:r>
-          </a:p>
-        </p:txBody>
-      </p:sp>
-      <p:sp>
-        <p:nvSpPr>
-          <p:cNvPr id="71" name="Rectangle 49"/>
+              <a:t>Dataset composition. Tokyo (49,868 epochs) is strictly held out and never seen during training or validation.</a:t>
+            </a:r>
+          </a:p>
+        </p:txBody>
+      </p:sp>
+      <p:sp>
+        <p:nvSpPr>
+          <p:cNvPr id="77" name="Rectangle 49"/>
           <p:cNvSpPr>
             <a:spLocks noChangeArrowheads="1"/>
           </p:cNvSpPr>
@@ -6749,14 +6317,14 @@
         </p:nvSpPr>
         <p:spPr bwMode="auto">
           <a:xfrm>
-            <a:off x="576364" y="28516187"/>
-            <a:ext cx="13572000" cy="522352"/>
+            <a:off x="14632787" y="20873247"/>
+            <a:ext cx="13572000" cy="459258"/>
           </a:xfrm>
           <a:prstGeom prst="rect">
             <a:avLst/>
           </a:prstGeom>
           <a:solidFill>
-            <a:srgbClr val="A6A6A6"/>
+            <a:srgbClr val="002060"/>
           </a:solidFill>
           <a:ln>
             <a:noFill/>
@@ -6768,7 +6336,7 @@
           </a:bodyPr>
           <a:lstStyle/>
           <a:p>
-            <a:pPr algn="l">
+            <a:pPr algn="ctr">
               <a:lnSpc>
                 <a:spcPct val="130000"/>
               </a:lnSpc>
@@ -6777,48 +6345,58 @@
               </a:spcAft>
             </a:pPr>
             <a:r>
-              <a:rPr sz="2600" b="1" i="0">
-                <a:solidFill>
-                  <a:srgbClr val="003366"/>
+              <a:rPr sz="2000" b="1" i="0" dirty="0">
+                <a:solidFill>
+                  <a:schemeClr val="bg1"/>
                 </a:solidFill>
                 <a:latin typeface="Calibri"/>
               </a:rPr>
-              <a:t>Reactive monitoring versus proactive prediction.</a:t>
-            </a:r>
-            <a:endParaRPr lang="en-GB" sz="2800" dirty="0"/>
-          </a:p>
-        </p:txBody>
-      </p:sp>
-      <p:sp>
-        <p:nvSpPr>
-          <p:cNvPr id="77" name="Rectangle 49"/>
-          <p:cNvSpPr>
-            <a:spLocks noChangeArrowheads="1"/>
-          </p:cNvSpPr>
+              <a:t>Ablation: both the Transformer and the LSTM are necessary; </a:t>
+            </a:r>
+            <a:r>
+              <a:rPr sz="2000" b="1" i="0" dirty="0" err="1">
+                <a:solidFill>
+                  <a:schemeClr val="bg1"/>
+                </a:solidFill>
+                <a:latin typeface="Calibri"/>
+              </a:rPr>
+              <a:t>receiver_tier</a:t>
+            </a:r>
+            <a:r>
+              <a:rPr sz="2000" b="1" i="0" dirty="0">
+                <a:solidFill>
+                  <a:schemeClr val="bg1"/>
+                </a:solidFill>
+                <a:latin typeface="Calibri"/>
+              </a:rPr>
+              <a:t> is the most important feature.</a:t>
+            </a:r>
+          </a:p>
+        </p:txBody>
+      </p:sp>
+      <p:sp>
+        <p:nvSpPr>
+          <p:cNvPr id="14378" name="TextBox 14377"/>
+          <p:cNvSpPr txBox="1"/>
           <p:nvPr/>
         </p:nvSpPr>
-        <p:spPr bwMode="auto">
+        <p:spPr>
           <a:xfrm>
-            <a:off x="14761940" y="17138923"/>
-            <a:ext cx="13572000" cy="522352"/>
+            <a:off x="14616603" y="11269490"/>
+            <a:ext cx="13572000" cy="460126"/>
           </a:xfrm>
           <a:prstGeom prst="rect">
             <a:avLst/>
           </a:prstGeom>
-          <a:solidFill>
-            <a:srgbClr val="637F26"/>
-          </a:solidFill>
-          <a:ln>
-            <a:noFill/>
-          </a:ln>
-        </p:spPr>
-        <p:txBody>
-          <a:bodyPr wrap="square" lIns="90580" tIns="45290" rIns="90580" bIns="45290">
+          <a:noFill/>
+        </p:spPr>
+        <p:txBody>
+          <a:bodyPr wrap="square" rtlCol="0">
             <a:spAutoFit/>
           </a:bodyPr>
           <a:lstStyle/>
           <a:p>
-            <a:pPr algn="l">
+            <a:pPr algn="ctr">
               <a:lnSpc>
                 <a:spcPct val="130000"/>
               </a:lnSpc>
@@ -6827,27 +6405,36 @@
               </a:spcAft>
             </a:pPr>
             <a:r>
-              <a:rPr sz="2600" b="1" i="0">
-                <a:solidFill>
-                  <a:srgbClr val="003366"/>
+              <a:rPr lang="en-US" sz="2000" i="1" dirty="0">
+                <a:solidFill>
+                  <a:srgbClr val="444A52"/>
                 </a:solidFill>
                 <a:latin typeface="Calibri"/>
               </a:rPr>
-              <a:t>Ablation: both the Transformer and the LSTM are necessary; receiver_tier is the most important feature.</a:t>
-            </a:r>
-          </a:p>
-        </p:txBody>
-      </p:sp>
-      <p:sp>
-        <p:nvSpPr>
-          <p:cNvPr id="14378" name="TextBox 14377"/>
+              <a:t>E</a:t>
+            </a:r>
+            <a:r>
+              <a:rPr sz="2000" b="0" i="1" dirty="0">
+                <a:solidFill>
+                  <a:srgbClr val="444A52"/>
+                </a:solidFill>
+                <a:latin typeface="Calibri"/>
+              </a:rPr>
+              <a:t>nd-to-end SENTINEL-GNSS pipeline, from raw GNSS signals to multi-horizon AV-planner inputs via the Transformer-LSTM.</a:t>
+            </a:r>
+          </a:p>
+        </p:txBody>
+      </p:sp>
+      <p:sp>
+        <p:nvSpPr>
+          <p:cNvPr id="14337" name="TextBox 14336"/>
           <p:cNvSpPr txBox="1"/>
           <p:nvPr/>
         </p:nvSpPr>
         <p:spPr>
           <a:xfrm>
-            <a:off x="14973300" y="10008533"/>
-            <a:ext cx="13572000" cy="707886"/>
+            <a:off x="14447667" y="25604680"/>
+            <a:ext cx="13537504" cy="860235"/>
           </a:xfrm>
           <a:prstGeom prst="rect">
             <a:avLst/>
@@ -6860,7 +6447,7 @@
           </a:bodyPr>
           <a:lstStyle/>
           <a:p>
-            <a:pPr algn="l">
+            <a:pPr algn="ctr">
               <a:lnSpc>
                 <a:spcPct val="130000"/>
               </a:lnSpc>
@@ -6869,40 +6456,47 @@
               </a:spcAft>
             </a:pPr>
             <a:r>
-              <a:rPr sz="2000" b="0" i="1">
+              <a:rPr sz="2000" b="0" i="1" dirty="0">
                 <a:solidFill>
                   <a:srgbClr val="444A52"/>
                 </a:solidFill>
                 <a:latin typeface="Calibri"/>
               </a:rPr>
-              <a:t>Fig. 4: End-to-end SENTINEL-GNSS pipeline, from raw GNSS signals to multi-horizon AV-planner inputs via the Transformer-LSTM.</a:t>
-            </a:r>
-          </a:p>
-        </p:txBody>
-      </p:sp>
-      <p:sp>
-        <p:nvSpPr>
-          <p:cNvPr id="14337" name="TextBox 14336"/>
-          <p:cNvSpPr txBox="1"/>
+              <a:t>Ablation across architecture variants (Macro-F1, MCC, DEGRADED-F1). Each component contributes independently to performance.</a:t>
+            </a:r>
+          </a:p>
+        </p:txBody>
+      </p:sp>
+      <p:sp>
+        <p:nvSpPr>
+          <p:cNvPr id="113" name="Rectangle 49"/>
+          <p:cNvSpPr>
+            <a:spLocks noChangeArrowheads="1"/>
+          </p:cNvSpPr>
           <p:nvPr/>
         </p:nvSpPr>
-        <p:spPr>
+        <p:spPr bwMode="auto">
           <a:xfrm>
-            <a:off x="14761940" y="23108036"/>
-            <a:ext cx="13537504" cy="707886"/>
+            <a:off x="14816700" y="26472753"/>
+            <a:ext cx="13572000" cy="459258"/>
           </a:xfrm>
           <a:prstGeom prst="rect">
             <a:avLst/>
           </a:prstGeom>
-          <a:noFill/>
-        </p:spPr>
-        <p:txBody>
-          <a:bodyPr wrap="square" rtlCol="0">
+          <a:solidFill>
+            <a:srgbClr val="002060"/>
+          </a:solidFill>
+          <a:ln>
+            <a:noFill/>
+          </a:ln>
+        </p:spPr>
+        <p:txBody>
+          <a:bodyPr wrap="square" lIns="90580" tIns="45290" rIns="90580" bIns="45290">
             <a:spAutoFit/>
           </a:bodyPr>
           <a:lstStyle/>
           <a:p>
-            <a:pPr algn="l">
+            <a:pPr algn="ctr">
               <a:lnSpc>
                 <a:spcPct val="130000"/>
               </a:lnSpc>
@@ -6911,27 +6505,27 @@
               </a:spcAft>
             </a:pPr>
             <a:r>
-              <a:rPr sz="2000" b="0" i="1">
-                <a:solidFill>
-                  <a:srgbClr val="444A52"/>
+              <a:rPr sz="2000" b="1" i="0" dirty="0">
+                <a:solidFill>
+                  <a:schemeClr val="bg1"/>
                 </a:solidFill>
                 <a:latin typeface="Calibri"/>
               </a:rPr>
-              <a:t>Fig. 6: Ablation across architecture variants (Macro-F1, MCC, DEGRADED-F1). Each component contributes independently to performance.</a:t>
-            </a:r>
-          </a:p>
-        </p:txBody>
-      </p:sp>
-      <p:sp>
-        <p:nvSpPr>
-          <p:cNvPr id="101" name="TextBox 100"/>
+              <a:t>Prediction-informed EKF keeps the trajectory accurate through blockage.</a:t>
+            </a:r>
+          </a:p>
+        </p:txBody>
+      </p:sp>
+      <p:sp>
+        <p:nvSpPr>
+          <p:cNvPr id="38" name="TextBox 37"/>
           <p:cNvSpPr txBox="1"/>
           <p:nvPr/>
         </p:nvSpPr>
         <p:spPr>
           <a:xfrm>
-            <a:off x="14668500" y="25194419"/>
-            <a:ext cx="1440160" cy="646331"/>
+            <a:off x="28755934" y="28156147"/>
+            <a:ext cx="13572000" cy="1449371"/>
           </a:xfrm>
           <a:prstGeom prst="rect">
             <a:avLst/>
@@ -6943,208 +6537,6 @@
             <a:spAutoFit/>
           </a:bodyPr>
           <a:lstStyle/>
-          <a:p>
-            <a:r>
-              <a:rPr lang="en-US" sz="3600" dirty="0">
-                <a:solidFill>
-                  <a:srgbClr val="000000"/>
-                </a:solidFill>
-              </a:rPr>
-              <a:t>A</a:t>
-            </a:r>
-          </a:p>
-        </p:txBody>
-      </p:sp>
-      <p:sp>
-        <p:nvSpPr>
-          <p:cNvPr id="96" name="TextBox 95"/>
-          <p:cNvSpPr txBox="1"/>
-          <p:nvPr/>
-        </p:nvSpPr>
-        <p:spPr>
-          <a:xfrm>
-            <a:off x="14977964" y="18148776"/>
-            <a:ext cx="1440160" cy="646331"/>
-          </a:xfrm>
-          <a:prstGeom prst="rect">
-            <a:avLst/>
-          </a:prstGeom>
-          <a:noFill/>
-        </p:spPr>
-        <p:txBody>
-          <a:bodyPr wrap="square" rtlCol="0">
-            <a:spAutoFit/>
-          </a:bodyPr>
-          <a:lstStyle/>
-          <a:p>
-            <a:r>
-              <a:rPr lang="en-US" sz="3600" dirty="0">
-                <a:solidFill>
-                  <a:srgbClr val="000000"/>
-                </a:solidFill>
-              </a:rPr>
-              <a:t>A</a:t>
-            </a:r>
-          </a:p>
-        </p:txBody>
-      </p:sp>
-      <p:sp>
-        <p:nvSpPr>
-          <p:cNvPr id="102" name="TextBox 101"/>
-          <p:cNvSpPr txBox="1"/>
-          <p:nvPr/>
-        </p:nvSpPr>
-        <p:spPr>
-          <a:xfrm>
-            <a:off x="21265289" y="18147035"/>
-            <a:ext cx="1273515" cy="646331"/>
-          </a:xfrm>
-          <a:prstGeom prst="rect">
-            <a:avLst/>
-          </a:prstGeom>
-          <a:noFill/>
-        </p:spPr>
-        <p:txBody>
-          <a:bodyPr wrap="square" rtlCol="0">
-            <a:spAutoFit/>
-          </a:bodyPr>
-          <a:lstStyle/>
-          <a:p>
-            <a:r>
-              <a:rPr lang="en-US" sz="3600" dirty="0">
-                <a:solidFill>
-                  <a:srgbClr val="000000"/>
-                </a:solidFill>
-              </a:rPr>
-              <a:t>B</a:t>
-            </a:r>
-          </a:p>
-        </p:txBody>
-      </p:sp>
-      <p:sp>
-        <p:nvSpPr>
-          <p:cNvPr id="113" name="Rectangle 49"/>
-          <p:cNvSpPr>
-            <a:spLocks noChangeArrowheads="1"/>
-          </p:cNvSpPr>
-          <p:nvPr/>
-        </p:nvSpPr>
-        <p:spPr bwMode="auto">
-          <a:xfrm>
-            <a:off x="14761940" y="24250580"/>
-            <a:ext cx="13572000" cy="522352"/>
-          </a:xfrm>
-          <a:prstGeom prst="rect">
-            <a:avLst/>
-          </a:prstGeom>
-          <a:solidFill>
-            <a:srgbClr val="637F26"/>
-          </a:solidFill>
-          <a:ln>
-            <a:noFill/>
-          </a:ln>
-        </p:spPr>
-        <p:txBody>
-          <a:bodyPr wrap="square" lIns="90580" tIns="45290" rIns="90580" bIns="45290">
-            <a:spAutoFit/>
-          </a:bodyPr>
-          <a:lstStyle/>
-          <a:p>
-            <a:pPr algn="l">
-              <a:lnSpc>
-                <a:spcPct val="130000"/>
-              </a:lnSpc>
-              <a:spcAft>
-                <a:spcPts val="600"/>
-              </a:spcAft>
-            </a:pPr>
-            <a:r>
-              <a:rPr sz="2600" b="1" i="0">
-                <a:solidFill>
-                  <a:srgbClr val="003366"/>
-                </a:solidFill>
-                <a:latin typeface="Calibri"/>
-              </a:rPr>
-              <a:t>Prediction-informed EKF keeps the trajectory accurate through blockage.</a:t>
-            </a:r>
-          </a:p>
-        </p:txBody>
-      </p:sp>
-      <p:sp>
-        <p:nvSpPr>
-          <p:cNvPr id="118" name="TextBox 117"/>
-          <p:cNvSpPr txBox="1"/>
-          <p:nvPr/>
-        </p:nvSpPr>
-        <p:spPr>
-          <a:xfrm>
-            <a:off x="19088100" y="25270619"/>
-            <a:ext cx="1440160" cy="646331"/>
-          </a:xfrm>
-          <a:prstGeom prst="rect">
-            <a:avLst/>
-          </a:prstGeom>
-          <a:noFill/>
-        </p:spPr>
-        <p:txBody>
-          <a:bodyPr wrap="square" rtlCol="0">
-            <a:spAutoFit/>
-          </a:bodyPr>
-          <a:lstStyle/>
-          <a:p>
-            <a:r>
-              <a:rPr lang="en-US" sz="3600" dirty="0">
-                <a:solidFill>
-                  <a:srgbClr val="000000"/>
-                </a:solidFill>
-              </a:rPr>
-              <a:t>B</a:t>
-            </a:r>
-          </a:p>
-        </p:txBody>
-      </p:sp>
-      <p:sp>
-        <p:nvSpPr>
-          <p:cNvPr id="38" name="TextBox 37"/>
-          <p:cNvSpPr txBox="1"/>
-          <p:nvPr/>
-        </p:nvSpPr>
-        <p:spPr>
-          <a:xfrm>
-            <a:off x="28768627" y="23643450"/>
-            <a:ext cx="13572000" cy="1200329"/>
-          </a:xfrm>
-          <a:prstGeom prst="rect">
-            <a:avLst/>
-          </a:prstGeom>
-          <a:noFill/>
-        </p:spPr>
-        <p:txBody>
-          <a:bodyPr wrap="square" rtlCol="0">
-            <a:spAutoFit/>
-          </a:bodyPr>
-          <a:lstStyle/>
-          <a:p>
-            <a:pPr marL="342900" indent="-342900" algn="just">
-              <a:lnSpc>
-                <a:spcPct val="130000"/>
-              </a:lnSpc>
-              <a:spcAft>
-                <a:spcPts val="400"/>
-              </a:spcAft>
-              <a:buFont typeface="Arial"/>
-              <a:buChar char="•"/>
-            </a:pPr>
-            <a:r>
-              <a:rPr sz="1600" b="0">
-                <a:solidFill>
-                  <a:srgbClr val="1C222B"/>
-                </a:solidFill>
-                <a:latin typeface="Calibri"/>
-              </a:rPr>
-              <a:t>Key results: first system to predict GNSS degradation 5 to 30 s ahead; Macro-F1 = 0.821 at +5 s (DEGRADED recall 0.847); cross-city DEGRADED F1 of 0.75 vs 0.15 for RF; 48.8% degraded-RMSE reduction via prediction-informed EKF; 0.039 ms inference for all horizons.</a:t>
-            </a:r>
-          </a:p>
           <a:p>
             <a:pPr algn="just">
               <a:lnSpc>
@@ -7155,13 +6547,76 @@
               </a:spcAft>
             </a:pPr>
             <a:r>
-              <a:rPr sz="1600" b="0">
+              <a:rPr lang="en-US" sz="1600" dirty="0">
                 <a:solidFill>
                   <a:srgbClr val="1C222B"/>
                 </a:solidFill>
                 <a:latin typeface="Calibri"/>
               </a:rPr>
-              <a:t>Honest disclosure: RF and XGBoost beat SENTINEL in-domain (F1 0.926 vs 0.821), but cross-city generalisation is the deployment-relevant metric.</a:t>
+              <a:t>This </a:t>
+            </a:r>
+            <a:r>
+              <a:rPr sz="1600" b="0" dirty="0">
+                <a:solidFill>
+                  <a:srgbClr val="1C222B"/>
+                </a:solidFill>
+                <a:latin typeface="Calibri"/>
+              </a:rPr>
+              <a:t>system</a:t>
+            </a:r>
+            <a:r>
+              <a:rPr lang="en-US" sz="1600" b="0" dirty="0">
+                <a:solidFill>
+                  <a:srgbClr val="1C222B"/>
+                </a:solidFill>
+                <a:latin typeface="Calibri"/>
+              </a:rPr>
+              <a:t> to the best of our knowledge is the </a:t>
+            </a:r>
+            <a:r>
+              <a:rPr lang="en-US" sz="1600" b="0" dirty="0" err="1">
+                <a:solidFill>
+                  <a:srgbClr val="1C222B"/>
+                </a:solidFill>
+                <a:latin typeface="Calibri"/>
+              </a:rPr>
+              <a:t>firt</a:t>
+            </a:r>
+            <a:r>
+              <a:rPr lang="en-US" sz="1600" b="0" dirty="0">
+                <a:solidFill>
+                  <a:srgbClr val="1C222B"/>
+                </a:solidFill>
+                <a:latin typeface="Calibri"/>
+              </a:rPr>
+              <a:t> </a:t>
+            </a:r>
+            <a:r>
+              <a:rPr sz="1600" b="0" dirty="0">
+                <a:solidFill>
+                  <a:srgbClr val="1C222B"/>
+                </a:solidFill>
+                <a:latin typeface="Calibri"/>
+              </a:rPr>
+              <a:t> to predict GNSS degradation 5 to 30 s ahead; Macro-F1 = 0.821 at +5 s (DEGRADED recall 0.847); cross-city DEGRADED F1 of 0.75 vs 0.15 for RF; 48.8% degraded-RMSE reduction via prediction-informed EKF; 0.039 </a:t>
+            </a:r>
+            <a:r>
+              <a:rPr sz="1600" b="0" dirty="0" err="1">
+                <a:solidFill>
+                  <a:srgbClr val="1C222B"/>
+                </a:solidFill>
+                <a:latin typeface="Calibri"/>
+              </a:rPr>
+              <a:t>ms</a:t>
+            </a:r>
+            <a:r>
+              <a:rPr sz="1600" b="0" dirty="0">
+                <a:solidFill>
+                  <a:srgbClr val="1C222B"/>
+                </a:solidFill>
+                <a:latin typeface="Calibri"/>
+              </a:rPr>
+              <a:t> inference for all horizons.</a:t>
             </a:r>
           </a:p>
           <a:p>
@@ -7174,42 +6629,68 @@
               </a:spcAft>
             </a:pPr>
             <a:r>
-              <a:rPr sz="1600" b="0">
+              <a:rPr sz="1600" b="0" dirty="0">
                 <a:solidFill>
                   <a:srgbClr val="1C222B"/>
                 </a:solidFill>
                 <a:latin typeface="Calibri"/>
               </a:rPr>
+              <a:t>Honest disclosure: RF and </a:t>
+            </a:r>
+            <a:r>
+              <a:rPr sz="1600" b="0" dirty="0" err="1">
+                <a:solidFill>
+                  <a:srgbClr val="1C222B"/>
+                </a:solidFill>
+                <a:latin typeface="Calibri"/>
+              </a:rPr>
+              <a:t>XGBoost</a:t>
+            </a:r>
+            <a:r>
+              <a:rPr sz="1600" b="0" dirty="0">
+                <a:solidFill>
+                  <a:srgbClr val="1C222B"/>
+                </a:solidFill>
+                <a:latin typeface="Calibri"/>
+              </a:rPr>
+              <a:t> beat SENTINEL in-domain (F1 0.926 vs 0.821), but cross-city </a:t>
+            </a:r>
+            <a:r>
+              <a:rPr sz="1600" b="0" dirty="0" err="1">
+                <a:solidFill>
+                  <a:srgbClr val="1C222B"/>
+                </a:solidFill>
+                <a:latin typeface="Calibri"/>
+              </a:rPr>
+              <a:t>generalisation</a:t>
+            </a:r>
+            <a:r>
+              <a:rPr sz="1600" b="0" dirty="0">
+                <a:solidFill>
+                  <a:srgbClr val="1C222B"/>
+                </a:solidFill>
+                <a:latin typeface="Calibri"/>
+              </a:rPr>
+              <a:t> is the deployment-relevant metric.</a:t>
+            </a:r>
+          </a:p>
+          <a:p>
+            <a:pPr algn="just">
+              <a:lnSpc>
+                <a:spcPct val="130000"/>
+              </a:lnSpc>
+              <a:spcAft>
+                <a:spcPts val="400"/>
+              </a:spcAft>
+            </a:pPr>
+            <a:r>
+              <a:rPr sz="1600" b="0" dirty="0">
+                <a:solidFill>
+                  <a:srgbClr val="1C222B"/>
+                </a:solidFill>
+                <a:latin typeface="Calibri"/>
+              </a:rPr>
               <a:t>Key finding: no single fusion method dominates every environment, so environment-aware method selection is a productive direction.</a:t>
-            </a:r>
-          </a:p>
-        </p:txBody>
-      </p:sp>
-      <p:sp>
-        <p:nvSpPr>
-          <p:cNvPr id="40" name="TextBox 39"/>
-          <p:cNvSpPr txBox="1"/>
-          <p:nvPr/>
-        </p:nvSpPr>
-        <p:spPr>
-          <a:xfrm>
-            <a:off x="28947516" y="4969571"/>
-            <a:ext cx="505267" cy="646331"/>
-          </a:xfrm>
-          <a:prstGeom prst="rect">
-            <a:avLst/>
-          </a:prstGeom>
-          <a:noFill/>
-        </p:spPr>
-        <p:txBody>
-          <a:bodyPr wrap="none" rtlCol="0">
-            <a:spAutoFit/>
-          </a:bodyPr>
-          <a:lstStyle/>
-          <a:p>
-            <a:r>
-              <a:rPr lang="en-US" sz="3600" dirty="0"/>
-              <a:t>A</a:t>
             </a:r>
           </a:p>
         </p:txBody>
@@ -7224,8 +6705,8 @@
         </p:nvSpPr>
         <p:spPr bwMode="auto">
           <a:xfrm>
-            <a:off x="576364" y="5473627"/>
-            <a:ext cx="13572000" cy="2850545"/>
+            <a:off x="7849172" y="5473627"/>
+            <a:ext cx="6299192" cy="4897259"/>
           </a:xfrm>
           <a:prstGeom prst="rect">
             <a:avLst/>
@@ -7284,38 +6765,26 @@
                 </a:solidFill>
                 <a:latin typeface="Calibri"/>
               </a:rPr>
+              <a:t>  </a:t>
+            </a:r>
+            <a:r>
+              <a:rPr sz="2200" b="0" i="0" dirty="0">
+                <a:solidFill>
+                  <a:srgbClr val="1C222B"/>
+                </a:solidFill>
+                <a:latin typeface="Calibri"/>
+              </a:rPr>
+              <a:t>In urban areas GNSS fails silently: NLOS multipath injects 10 to 200 m errors while the receiver still reports a 'valid' fix. Existing monitors (RAIM, Q-codes, ML classifiers) are reactive, acting only after degradation begins.</a:t>
+            </a:r>
+            <a:r>
+              <a:rPr lang="en-US" sz="2200" b="0" i="0" dirty="0">
+                <a:solidFill>
+                  <a:srgbClr val="1C222B"/>
+                </a:solidFill>
+                <a:latin typeface="Calibri"/>
+              </a:rPr>
               <a:t> </a:t>
             </a:r>
-            <a:endParaRPr lang="en-GB" dirty="0"/>
-          </a:p>
-          <a:p>
-            <a:pPr algn="just">
-              <a:lnSpc>
-                <a:spcPct val="130000"/>
-              </a:lnSpc>
-              <a:spcAft>
-                <a:spcPts val="600"/>
-              </a:spcAft>
-            </a:pPr>
-            <a:r>
-              <a:rPr sz="2200" b="0" i="0" dirty="0">
-                <a:solidFill>
-                  <a:srgbClr val="1C222B"/>
-                </a:solidFill>
-                <a:latin typeface="Calibri"/>
-              </a:rPr>
-              <a:t>In urban areas GNSS fails silently: NLOS multipath injects 10 to 200 m errors while the receiver still reports a 'valid' fix. Existing monitors (RAIM, Q-codes, ML classifiers) are reactive, acting only after degradation begins.</a:t>
-            </a:r>
-          </a:p>
-          <a:p>
-            <a:pPr algn="just">
-              <a:lnSpc>
-                <a:spcPct val="130000"/>
-              </a:lnSpc>
-              <a:spcAft>
-                <a:spcPts val="600"/>
-              </a:spcAft>
-            </a:pPr>
             <a:r>
               <a:rPr sz="2200" b="0" i="0" dirty="0">
                 <a:solidFill>
@@ -7363,341 +6832,14 @@
       </p:sp>
       <p:sp>
         <p:nvSpPr>
-          <p:cNvPr id="119" name="TextBox 118"/>
-          <p:cNvSpPr txBox="1"/>
-          <p:nvPr/>
-        </p:nvSpPr>
-        <p:spPr>
-          <a:xfrm>
-            <a:off x="10234978" y="12936955"/>
-            <a:ext cx="3834660" cy="3046988"/>
-          </a:xfrm>
-          <a:prstGeom prst="rect">
-            <a:avLst/>
-          </a:prstGeom>
-          <a:solidFill>
-            <a:schemeClr val="bg1"/>
-          </a:solidFill>
-          <a:ln w="76200">
-            <a:solidFill>
-              <a:schemeClr val="bg1">
-                <a:lumMod val="50000"/>
-              </a:schemeClr>
-            </a:solidFill>
-          </a:ln>
-        </p:spPr>
-        <p:txBody>
-          <a:bodyPr wrap="square" rtlCol="0">
-            <a:spAutoFit/>
-          </a:bodyPr>
-          <a:lstStyle/>
-          <a:p>
-            <a:pPr algn="ctr"/>
-            <a:r>
-              <a:rPr lang="en-CA" dirty="0">
-                <a:solidFill>
-                  <a:schemeClr val="bg1">
-                    <a:lumMod val="50000"/>
-                  </a:schemeClr>
-                </a:solidFill>
-              </a:rPr>
-              <a:t>Insert a Diagram or image to help explain your methods</a:t>
-            </a:r>
-          </a:p>
-          <a:p>
-            <a:pPr algn="ctr"/>
-            <a:endParaRPr lang="en-CA" dirty="0">
-              <a:solidFill>
-                <a:schemeClr val="bg1">
-                  <a:lumMod val="50000"/>
-                </a:schemeClr>
-              </a:solidFill>
-            </a:endParaRPr>
-          </a:p>
-          <a:p>
-            <a:pPr algn="ctr"/>
-            <a:endParaRPr lang="en-CA" dirty="0">
-              <a:solidFill>
-                <a:schemeClr val="bg1">
-                  <a:lumMod val="50000"/>
-                </a:schemeClr>
-              </a:solidFill>
-            </a:endParaRPr>
-          </a:p>
-          <a:p>
-            <a:pPr algn="ctr"/>
-            <a:endParaRPr lang="en-CA" dirty="0">
-              <a:solidFill>
-                <a:schemeClr val="bg1">
-                  <a:lumMod val="50000"/>
-                </a:schemeClr>
-              </a:solidFill>
-            </a:endParaRPr>
-          </a:p>
-          <a:p>
-            <a:pPr algn="ctr"/>
-            <a:endParaRPr lang="en-CA" dirty="0">
-              <a:solidFill>
-                <a:schemeClr val="bg1">
-                  <a:lumMod val="50000"/>
-                </a:schemeClr>
-              </a:solidFill>
-            </a:endParaRPr>
-          </a:p>
-          <a:p>
-            <a:pPr algn="ctr"/>
-            <a:endParaRPr lang="en-CA" dirty="0">
-              <a:solidFill>
-                <a:schemeClr val="bg1">
-                  <a:lumMod val="50000"/>
-                </a:schemeClr>
-              </a:solidFill>
-            </a:endParaRPr>
-          </a:p>
-        </p:txBody>
-      </p:sp>
-      <p:sp>
-        <p:nvSpPr>
-          <p:cNvPr id="120" name="TextBox 119"/>
-          <p:cNvSpPr txBox="1"/>
-          <p:nvPr/>
-        </p:nvSpPr>
-        <p:spPr>
-          <a:xfrm>
-            <a:off x="432348" y="24256443"/>
-            <a:ext cx="13572000" cy="2677656"/>
-          </a:xfrm>
-          <a:prstGeom prst="rect">
-            <a:avLst/>
-          </a:prstGeom>
-          <a:solidFill>
-            <a:schemeClr val="bg1"/>
-          </a:solidFill>
-          <a:ln w="76200">
-            <a:solidFill>
-              <a:schemeClr val="bg1">
-                <a:lumMod val="50000"/>
-              </a:schemeClr>
-            </a:solidFill>
-          </a:ln>
-        </p:spPr>
-        <p:txBody>
-          <a:bodyPr wrap="square" rtlCol="0">
-            <a:spAutoFit/>
-          </a:bodyPr>
-          <a:lstStyle/>
-          <a:p>
-            <a:pPr algn="ctr"/>
-            <a:r>
-              <a:rPr lang="en-CA" dirty="0">
-                <a:solidFill>
-                  <a:schemeClr val="bg1">
-                    <a:lumMod val="50000"/>
-                  </a:schemeClr>
-                </a:solidFill>
-              </a:rPr>
-              <a:t>Insert a Diagram or image to help explain your methods</a:t>
-            </a:r>
-          </a:p>
-          <a:p>
-            <a:pPr algn="ctr"/>
-            <a:endParaRPr lang="en-CA" dirty="0">
-              <a:solidFill>
-                <a:schemeClr val="bg1">
-                  <a:lumMod val="50000"/>
-                </a:schemeClr>
-              </a:solidFill>
-            </a:endParaRPr>
-          </a:p>
-          <a:p>
-            <a:pPr algn="ctr"/>
-            <a:endParaRPr lang="en-CA" dirty="0">
-              <a:solidFill>
-                <a:schemeClr val="bg1">
-                  <a:lumMod val="50000"/>
-                </a:schemeClr>
-              </a:solidFill>
-            </a:endParaRPr>
-          </a:p>
-          <a:p>
-            <a:pPr algn="ctr"/>
-            <a:endParaRPr lang="en-CA" dirty="0">
-              <a:solidFill>
-                <a:schemeClr val="bg1">
-                  <a:lumMod val="50000"/>
-                </a:schemeClr>
-              </a:solidFill>
-            </a:endParaRPr>
-          </a:p>
-          <a:p>
-            <a:pPr algn="ctr"/>
-            <a:endParaRPr lang="en-CA" dirty="0">
-              <a:solidFill>
-                <a:schemeClr val="bg1">
-                  <a:lumMod val="50000"/>
-                </a:schemeClr>
-              </a:solidFill>
-            </a:endParaRPr>
-          </a:p>
-          <a:p>
-            <a:pPr algn="ctr"/>
-            <a:endParaRPr lang="en-CA" dirty="0">
-              <a:solidFill>
-                <a:schemeClr val="bg1">
-                  <a:lumMod val="50000"/>
-                </a:schemeClr>
-              </a:solidFill>
-            </a:endParaRPr>
-          </a:p>
-          <a:p>
-            <a:pPr algn="ctr"/>
-            <a:endParaRPr lang="en-CA" dirty="0">
-              <a:solidFill>
-                <a:schemeClr val="bg1">
-                  <a:lumMod val="50000"/>
-                </a:schemeClr>
-              </a:solidFill>
-            </a:endParaRPr>
-          </a:p>
-        </p:txBody>
-      </p:sp>
-      <p:sp>
-        <p:nvSpPr>
-          <p:cNvPr id="121" name="TextBox 120"/>
-          <p:cNvSpPr txBox="1"/>
-          <p:nvPr/>
-        </p:nvSpPr>
-        <p:spPr>
-          <a:xfrm>
-            <a:off x="14704136" y="5735714"/>
-            <a:ext cx="13572000" cy="4154984"/>
-          </a:xfrm>
-          <a:prstGeom prst="rect">
-            <a:avLst/>
-          </a:prstGeom>
-          <a:solidFill>
-            <a:schemeClr val="bg1"/>
-          </a:solidFill>
-          <a:ln w="76200">
-            <a:solidFill>
-              <a:schemeClr val="bg1">
-                <a:lumMod val="50000"/>
-              </a:schemeClr>
-            </a:solidFill>
-          </a:ln>
-        </p:spPr>
-        <p:txBody>
-          <a:bodyPr wrap="square" rtlCol="0" anchor="ctr">
-            <a:spAutoFit/>
-          </a:bodyPr>
-          <a:lstStyle/>
-          <a:p>
-            <a:pPr algn="just">
-              <a:lnSpc>
-                <a:spcPct val="130000"/>
-              </a:lnSpc>
-              <a:spcAft>
-                <a:spcPts val="400"/>
-              </a:spcAft>
-            </a:pPr>
-            <a:r>
-              <a:rPr sz="2200" b="0">
-                <a:solidFill>
-                  <a:srgbClr val="1C222B"/>
-                </a:solidFill>
-                <a:latin typeface="Calibri"/>
-              </a:rPr>
-              <a:t>SENTINEL-GNSS is a hybrid Transformer-LSTM. The Transformer (2 layers, 8 heads, d_model=128) reads global patterns across the 30 s window, while the stacked LSTM (hidden=256) tracks the directional approach to blockage as C/N0 declines and residuals grow. Three heads forecast +5 / +15 / +30 s in one forward pass.</a:t>
-            </a:r>
-          </a:p>
-          <a:p>
-            <a:pPr algn="just">
-              <a:lnSpc>
-                <a:spcPct val="130000"/>
-              </a:lnSpc>
-              <a:spcAft>
-                <a:spcPts val="400"/>
-              </a:spcAft>
-            </a:pPr>
-            <a:r>
-              <a:rPr sz="2200" b="1">
-                <a:solidFill>
-                  <a:srgbClr val="1C222B"/>
-                </a:solidFill>
-                <a:latin typeface="Calibri"/>
-              </a:rPr>
-              <a:t>Inference &amp; Deployment: </a:t>
-            </a:r>
-            <a:r>
-              <a:rPr sz="2200" b="0">
-                <a:solidFill>
-                  <a:srgbClr val="1C222B"/>
-                </a:solidFill>
-                <a:latin typeface="Calibri"/>
-              </a:rPr>
-              <a:t>1.46 M parameters, 0.039 ms per sample, all three horizons in one pass, 10.5x faster than three tree models, within a 10 Hz vehicle-compute budget.</a:t>
-            </a:r>
-          </a:p>
-        </p:txBody>
-      </p:sp>
-      <p:pic>
-        <p:nvPicPr>
-          <p:cNvPr id="14362" name="Picture 14361"/>
-          <p:cNvPicPr>
-            <a:picLocks noChangeAspect="1"/>
-          </p:cNvPicPr>
-          <p:nvPr/>
-        </p:nvPicPr>
-        <p:blipFill>
-          <a:blip r:embed="rId5"/>
-          <a:stretch>
-            <a:fillRect/>
-          </a:stretch>
-        </p:blipFill>
-        <p:spPr>
-          <a:xfrm>
-            <a:off x="14683956" y="18631797"/>
-            <a:ext cx="13811250" cy="4286250"/>
-          </a:xfrm>
-          <a:prstGeom prst="rect">
-            <a:avLst/>
-          </a:prstGeom>
-        </p:spPr>
-      </p:pic>
-      <p:pic>
-        <p:nvPicPr>
-          <p:cNvPr id="14363" name="Picture 14362"/>
-          <p:cNvPicPr>
-            <a:picLocks noChangeAspect="1"/>
-          </p:cNvPicPr>
-          <p:nvPr/>
-        </p:nvPicPr>
-        <p:blipFill>
-          <a:blip r:embed="rId6"/>
-          <a:stretch>
-            <a:fillRect/>
-          </a:stretch>
-        </p:blipFill>
-        <p:spPr>
-          <a:xfrm>
-            <a:off x="14704136" y="25764559"/>
-            <a:ext cx="9039225" cy="3924300"/>
-          </a:xfrm>
-          <a:prstGeom prst="rect">
-            <a:avLst/>
-          </a:prstGeom>
-        </p:spPr>
-      </p:pic>
-      <p:sp>
-        <p:nvSpPr>
           <p:cNvPr id="132" name="TextBox 131"/>
           <p:cNvSpPr txBox="1"/>
           <p:nvPr/>
         </p:nvSpPr>
         <p:spPr>
           <a:xfrm>
-            <a:off x="14668500" y="30204908"/>
-            <a:ext cx="13537504" cy="1015663"/>
+            <a:off x="14667283" y="31743512"/>
+            <a:ext cx="13537504" cy="460126"/>
           </a:xfrm>
           <a:prstGeom prst="rect">
             <a:avLst/>
@@ -7710,7 +6852,7 @@
           </a:bodyPr>
           <a:lstStyle/>
           <a:p>
-            <a:pPr algn="l">
+            <a:pPr algn="ctr">
               <a:lnSpc>
                 <a:spcPct val="130000"/>
               </a:lnSpc>
@@ -7719,13 +6861,13 @@
               </a:spcAft>
             </a:pPr>
             <a:r>
-              <a:rPr sz="2000" b="0" i="1">
+              <a:rPr sz="2000" b="0" i="1" dirty="0">
                 <a:solidFill>
                   <a:srgbClr val="444A52"/>
                 </a:solidFill>
                 <a:latin typeface="Calibri"/>
               </a:rPr>
-              <a:t>Fig. 8: SENTINEL trajectory (blue) hugs ground truth through blockage while the Fixed-R EKF and raw GNSS diverge.</a:t>
+              <a:t>SENTINEL trajectory (blue) hugs ground truth through blockage while the Fixed-R EKF and raw GNSS diverge.</a:t>
             </a:r>
           </a:p>
         </p:txBody>
@@ -7738,8 +6880,8 @@
         </p:nvSpPr>
         <p:spPr>
           <a:xfrm>
-            <a:off x="28875508" y="12188653"/>
-            <a:ext cx="13537504" cy="400110"/>
+            <a:off x="29186885" y="9312941"/>
+            <a:ext cx="6652163" cy="1260345"/>
           </a:xfrm>
           <a:prstGeom prst="rect">
             <a:avLst/>
@@ -7752,7 +6894,7 @@
           </a:bodyPr>
           <a:lstStyle/>
           <a:p>
-            <a:pPr algn="l">
+            <a:pPr algn="ctr">
               <a:lnSpc>
                 <a:spcPct val="130000"/>
               </a:lnSpc>
@@ -7761,79 +6903,32 @@
               </a:spcAft>
             </a:pPr>
             <a:r>
-              <a:rPr sz="2000" b="0" i="1">
+              <a:rPr sz="2000" b="0" i="1" dirty="0">
                 <a:solidFill>
                   <a:srgbClr val="444A52"/>
                 </a:solidFill>
                 <a:latin typeface="Calibri"/>
               </a:rPr>
-              <a:t>Fig. 7: Cross-city DEGRADED-class F1 at +5 s. SENTINEL 0.75 versus RF 0.15, a 5x generalisation gap that widens further at +15 s and +30 s.</a:t>
-            </a:r>
-          </a:p>
-        </p:txBody>
-      </p:sp>
-      <p:sp>
-        <p:nvSpPr>
-          <p:cNvPr id="139" name="TextBox 138"/>
-          <p:cNvSpPr txBox="1"/>
-          <p:nvPr/>
-        </p:nvSpPr>
-        <p:spPr>
-          <a:xfrm>
-            <a:off x="35062852" y="30358080"/>
-            <a:ext cx="7330098" cy="1200329"/>
-          </a:xfrm>
-          <a:prstGeom prst="rect">
-            <a:avLst/>
-          </a:prstGeom>
-          <a:solidFill>
-            <a:schemeClr val="bg1"/>
-          </a:solidFill>
-          <a:ln w="76200">
-            <a:solidFill>
-              <a:schemeClr val="bg1">
-                <a:lumMod val="50000"/>
-              </a:schemeClr>
-            </a:solidFill>
-          </a:ln>
-        </p:spPr>
-        <p:txBody>
-          <a:bodyPr wrap="square" rtlCol="0">
-            <a:spAutoFit/>
-          </a:bodyPr>
-          <a:lstStyle/>
-          <a:p>
-            <a:pPr algn="ctr" defTabSz="942975"/>
-            <a:r>
-              <a:rPr lang="en-CA" dirty="0">
-                <a:solidFill>
-                  <a:schemeClr val="bg1">
-                    <a:lumMod val="50000"/>
-                  </a:schemeClr>
-                </a:solidFill>
-              </a:rPr>
-              <a:t>Add the logo(s) from your funding organization</a:t>
-            </a:r>
-          </a:p>
-          <a:p>
-            <a:pPr algn="ctr" defTabSz="942975"/>
-            <a:endParaRPr lang="en-CA" dirty="0">
-              <a:solidFill>
-                <a:schemeClr val="bg1">
-                  <a:lumMod val="50000"/>
-                </a:schemeClr>
-              </a:solidFill>
-            </a:endParaRPr>
-          </a:p>
-          <a:p>
-            <a:pPr algn="ctr"/>
-            <a:endParaRPr lang="en-CA" dirty="0">
-              <a:solidFill>
-                <a:schemeClr val="bg1">
-                  <a:lumMod val="50000"/>
-                </a:schemeClr>
-              </a:solidFill>
-            </a:endParaRPr>
+              <a:t>Fig. 7: Cross-city DEGRADED-class F1 at +5 s. SENTINEL 0.75 versus RF 0.15, a 5x </a:t>
+            </a:r>
+            <a:r>
+              <a:rPr sz="2000" b="0" i="1" dirty="0" err="1">
+                <a:solidFill>
+                  <a:srgbClr val="444A52"/>
+                </a:solidFill>
+                <a:latin typeface="Calibri"/>
+              </a:rPr>
+              <a:t>generalisation</a:t>
+            </a:r>
+            <a:r>
+              <a:rPr sz="2000" b="0" i="1" dirty="0">
+                <a:solidFill>
+                  <a:srgbClr val="444A52"/>
+                </a:solidFill>
+                <a:latin typeface="Calibri"/>
+              </a:rPr>
+              <a:t> gap that widens further at +15 s and +30 s.</a:t>
+            </a:r>
           </a:p>
         </p:txBody>
       </p:sp>
@@ -7852,7 +6947,7 @@
           <p:nvPr/>
         </p:nvPicPr>
         <p:blipFill>
-          <a:blip r:embed="rId7"/>
+          <a:blip r:embed="rId4"/>
           <a:stretch>
             <a:fillRect/>
           </a:stretch>
@@ -7885,7 +6980,7 @@
           <p:nvPr/>
         </p:nvPicPr>
         <p:blipFill>
-          <a:blip r:embed="rId8"/>
+          <a:blip r:embed="rId5"/>
           <a:stretch>
             <a:fillRect/>
           </a:stretch>
@@ -8212,7 +7307,7 @@
         <p:spPr>
           <a:xfrm>
             <a:off x="11028606" y="2082573"/>
-            <a:ext cx="21898372" cy="923330"/>
+            <a:ext cx="21898372" cy="830997"/>
           </a:xfrm>
           <a:prstGeom prst="rect">
             <a:avLst/>
@@ -8237,7 +7332,7 @@
               </a:spcAft>
             </a:pPr>
             <a:r>
-              <a:rPr lang="en-US" sz="3600" u="none" strike="noStrike" dirty="0">
+              <a:rPr lang="en-US" sz="3200" u="none" strike="noStrike" dirty="0">
                 <a:solidFill>
                   <a:schemeClr val="bg1"/>
                 </a:solidFill>
@@ -8248,7 +7343,7 @@
               <a:t>Regional Centre for Space Science and Technology Education in Asia and the Pacific | </a:t>
             </a:r>
             <a:r>
-              <a:rPr lang="en-US" sz="3600" dirty="0" err="1">
+              <a:rPr lang="en-US" sz="3200" dirty="0" err="1">
                 <a:solidFill>
                   <a:schemeClr val="bg1"/>
                 </a:solidFill>
@@ -8258,7 +7353,7 @@
               <a:t>Beihang</a:t>
             </a:r>
             <a:r>
-              <a:rPr lang="en-US" sz="3600" dirty="0">
+              <a:rPr lang="en-US" sz="3200" dirty="0">
                 <a:solidFill>
                   <a:schemeClr val="bg1"/>
                 </a:solidFill>
@@ -8267,7 +7362,7 @@
               </a:rPr>
               <a:t> University</a:t>
             </a:r>
-            <a:endParaRPr lang="en-US" sz="3600" i="0" u="none" strike="noStrike" dirty="0">
+            <a:endParaRPr lang="en-US" sz="3200" i="0" u="none" strike="noStrike" dirty="0">
               <a:solidFill>
                 <a:schemeClr val="bg1"/>
               </a:solidFill>
@@ -8284,11 +7379,17 @@
           <p:cNvGraphicFramePr>
             <a:graphicFrameLocks noGrp="1"/>
           </p:cNvGraphicFramePr>
-          <p:nvPr/>
+          <p:nvPr>
+            <p:extLst>
+              <p:ext uri="{D42A27DB-BD31-4B8C-83A1-F6EECF244321}">
+                <p14:modId xmlns:p14="http://schemas.microsoft.com/office/powerpoint/2010/main" val="1383511444"/>
+              </p:ext>
+            </p:extLst>
+          </p:nvPr>
         </p:nvGraphicFramePr>
         <p:xfrm>
-          <a:off x="14721840" y="11978640"/>
-          <a:ext cx="13533120" cy="3108960"/>
+          <a:off x="14639353" y="12624039"/>
+          <a:ext cx="5678146" cy="3108960"/>
         </p:xfrm>
         <a:graphic>
           <a:graphicData uri="http://schemas.openxmlformats.org/drawingml/2006/table">
@@ -8297,28 +7398,28 @@
                 <a:tableStyleId>{5C22544A-7EE6-4342-B048-85BDC9FD1C3A}</a:tableStyleId>
               </a:tblPr>
               <a:tblGrid>
-                <a:gridCol w="3108960">
+                <a:gridCol w="1304439">
                   <a:extLst>
                     <a:ext uri="{9D8B030D-6E8A-4147-A177-3AD203B41FA5}">
                       <a16:colId xmlns:a16="http://schemas.microsoft.com/office/drawing/2014/main" val="20000"/>
                     </a:ext>
                   </a:extLst>
                 </a:gridCol>
-                <a:gridCol w="3474720">
+                <a:gridCol w="1457902">
                   <a:extLst>
                     <a:ext uri="{9D8B030D-6E8A-4147-A177-3AD203B41FA5}">
                       <a16:colId xmlns:a16="http://schemas.microsoft.com/office/drawing/2014/main" val="20001"/>
                     </a:ext>
                   </a:extLst>
                 </a:gridCol>
-                <a:gridCol w="3657600">
+                <a:gridCol w="2058484">
                   <a:extLst>
                     <a:ext uri="{9D8B030D-6E8A-4147-A177-3AD203B41FA5}">
                       <a16:colId xmlns:a16="http://schemas.microsoft.com/office/drawing/2014/main" val="20002"/>
                     </a:ext>
                   </a:extLst>
                 </a:gridCol>
-                <a:gridCol w="3291840">
+                <a:gridCol w="857321">
                   <a:extLst>
                     <a:ext uri="{9D8B030D-6E8A-4147-A177-3AD203B41FA5}">
                       <a16:colId xmlns:a16="http://schemas.microsoft.com/office/drawing/2014/main" val="20003"/>
@@ -8357,7 +7458,7 @@
                     <a:p>
                       <a:pPr algn="ctr"/>
                       <a:r>
-                        <a:rPr sz="2300" b="1">
+                        <a:rPr sz="2300" b="1" dirty="0">
                           <a:solidFill>
                             <a:srgbClr val="FFFFFF"/>
                           </a:solidFill>
@@ -8631,7 +7732,7 @@
                     <a:p>
                       <a:pPr algn="l"/>
                       <a:r>
-                        <a:rPr sz="2200" b="0">
+                        <a:rPr sz="2200" b="0" dirty="0">
                           <a:solidFill>
                             <a:srgbClr val="1C222B"/>
                           </a:solidFill>
@@ -8654,7 +7755,7 @@
                     <a:p>
                       <a:pPr algn="ctr"/>
                       <a:r>
-                        <a:rPr sz="2200" b="0">
+                        <a:rPr sz="2200" b="0" dirty="0">
                           <a:solidFill>
                             <a:srgbClr val="1C222B"/>
                           </a:solidFill>
@@ -8700,7 +7801,7 @@
                     <a:p>
                       <a:pPr algn="ctr"/>
                       <a:r>
-                        <a:rPr sz="2200" b="0">
+                        <a:rPr sz="2200" b="0" dirty="0">
                           <a:solidFill>
                             <a:srgbClr val="1C222B"/>
                           </a:solidFill>
@@ -8734,8 +7835,8 @@
         </p:nvSpPr>
         <p:spPr>
           <a:xfrm>
-            <a:off x="14721840" y="15179040"/>
-            <a:ext cx="13533120" cy="548640"/>
+            <a:off x="14640436" y="15996026"/>
+            <a:ext cx="5678146" cy="923330"/>
           </a:xfrm>
           <a:prstGeom prst="rect">
             <a:avLst/>
@@ -8748,15 +7849,15 @@
           </a:bodyPr>
           <a:lstStyle/>
           <a:p>
-            <a:pPr algn="l"/>
-            <a:r>
-              <a:rPr sz="1800" i="1">
+            <a:pPr algn="ctr"/>
+            <a:r>
+              <a:rPr sz="1800" i="1" dirty="0">
                 <a:solidFill>
                   <a:srgbClr val="444A52"/>
                 </a:solidFill>
                 <a:latin typeface="Calibri"/>
               </a:rPr>
-              <a:t>Table 1: Multi-horizon classification metrics. Held-out test (n=1,686); 95% CI via 1,000 bootstrap iterations. DEGRADED recall = 0.847 at +5 s.</a:t>
+              <a:t>Multi-horizon classification metrics. Held-out test (n=1,686); 95% CI via 1,000 bootstrap iterations. DEGRADED recall = 0.847 at +5 s.</a:t>
             </a:r>
           </a:p>
         </p:txBody>
@@ -8767,10 +7868,16 @@
           <p:cNvGraphicFramePr>
             <a:graphicFrameLocks noGrp="1"/>
           </p:cNvGraphicFramePr>
-          <p:nvPr/>
+          <p:nvPr>
+            <p:extLst>
+              <p:ext uri="{D42A27DB-BD31-4B8C-83A1-F6EECF244321}">
+                <p14:modId xmlns:p14="http://schemas.microsoft.com/office/powerpoint/2010/main" val="243582850"/>
+              </p:ext>
+            </p:extLst>
+          </p:nvPr>
         </p:nvGraphicFramePr>
         <p:xfrm>
-          <a:off x="29032200" y="16916400"/>
+          <a:off x="28989704" y="16316145"/>
           <a:ext cx="13533120" cy="1783080"/>
         </p:xfrm>
         <a:graphic>
@@ -8886,7 +7993,7 @@
                     <a:p>
                       <a:pPr algn="l"/>
                       <a:r>
-                        <a:rPr sz="2000" b="0">
+                        <a:rPr sz="2000" b="0" dirty="0">
                           <a:solidFill>
                             <a:srgbClr val="1C222B"/>
                           </a:solidFill>
@@ -9084,7 +8191,7 @@
                     <a:p>
                       <a:pPr algn="ctr"/>
                       <a:r>
-                        <a:rPr sz="2000" b="0">
+                        <a:rPr sz="2000" b="0" dirty="0">
                           <a:solidFill>
                             <a:srgbClr val="1C222B"/>
                           </a:solidFill>
@@ -9110,6 +8217,388 @@
           </a:graphicData>
         </a:graphic>
       </p:graphicFrame>
+      <p:sp>
+        <p:nvSpPr>
+          <p:cNvPr id="5" name="TextBox 4">
+            <a:extLst>
+              <a:ext uri="{FF2B5EF4-FFF2-40B4-BE49-F238E27FC236}">
+                <a16:creationId xmlns:a16="http://schemas.microsoft.com/office/drawing/2014/main" id="{B5046050-CCC0-4B04-AD2D-7E227D9930E3}"/>
+              </a:ext>
+            </a:extLst>
+          </p:cNvPr>
+          <p:cNvSpPr txBox="1"/>
+          <p:nvPr/>
+        </p:nvSpPr>
+        <p:spPr>
+          <a:xfrm>
+            <a:off x="14723120" y="5412344"/>
+            <a:ext cx="13582573" cy="2985626"/>
+          </a:xfrm>
+          <a:prstGeom prst="rect">
+            <a:avLst/>
+          </a:prstGeom>
+          <a:noFill/>
+        </p:spPr>
+        <p:txBody>
+          <a:bodyPr wrap="square">
+            <a:spAutoFit/>
+          </a:bodyPr>
+          <a:lstStyle/>
+          <a:p>
+            <a:pPr algn="just">
+              <a:lnSpc>
+                <a:spcPct val="130000"/>
+              </a:lnSpc>
+              <a:spcAft>
+                <a:spcPts val="400"/>
+              </a:spcAft>
+            </a:pPr>
+            <a:r>
+              <a:rPr lang="en-US" sz="2400" b="0" dirty="0">
+                <a:solidFill>
+                  <a:srgbClr val="1C222B"/>
+                </a:solidFill>
+                <a:latin typeface="Calibri"/>
+              </a:rPr>
+              <a:t>SENTINEL-GNSS is a hybrid Transformer-LSTM. The Transformer (2 layers, 8 heads, </a:t>
+            </a:r>
+            <a:r>
+              <a:rPr lang="en-US" sz="2400" b="0" dirty="0" err="1">
+                <a:solidFill>
+                  <a:srgbClr val="1C222B"/>
+                </a:solidFill>
+                <a:latin typeface="Calibri"/>
+              </a:rPr>
+              <a:t>d_model</a:t>
+            </a:r>
+            <a:r>
+              <a:rPr lang="en-US" sz="2400" b="0" dirty="0">
+                <a:solidFill>
+                  <a:srgbClr val="1C222B"/>
+                </a:solidFill>
+                <a:latin typeface="Calibri"/>
+              </a:rPr>
+              <a:t>=128) reads global patterns across the 30 s window, while the stacked LSTM (hidden=256) tracks the directional approach to blockage as C/N0 declines and residuals grow. Three heads forecast +5 / +15 / +30 s in one forward pass.</a:t>
+            </a:r>
+          </a:p>
+          <a:p>
+            <a:pPr algn="just">
+              <a:lnSpc>
+                <a:spcPct val="130000"/>
+              </a:lnSpc>
+              <a:spcAft>
+                <a:spcPts val="400"/>
+              </a:spcAft>
+            </a:pPr>
+            <a:r>
+              <a:rPr lang="en-US" sz="2400" b="1" dirty="0">
+                <a:solidFill>
+                  <a:srgbClr val="1C222B"/>
+                </a:solidFill>
+                <a:latin typeface="Calibri"/>
+              </a:rPr>
+              <a:t>Inference &amp; Deployment: </a:t>
+            </a:r>
+            <a:r>
+              <a:rPr lang="en-US" sz="2400" b="0" dirty="0">
+                <a:solidFill>
+                  <a:srgbClr val="1C222B"/>
+                </a:solidFill>
+                <a:latin typeface="Calibri"/>
+              </a:rPr>
+              <a:t>1.46 M parameters, 0.039 </a:t>
+            </a:r>
+            <a:r>
+              <a:rPr lang="en-US" sz="2400" b="0" dirty="0" err="1">
+                <a:solidFill>
+                  <a:srgbClr val="1C222B"/>
+                </a:solidFill>
+                <a:latin typeface="Calibri"/>
+              </a:rPr>
+              <a:t>ms</a:t>
+            </a:r>
+            <a:r>
+              <a:rPr lang="en-US" sz="2400" b="0" dirty="0">
+                <a:solidFill>
+                  <a:srgbClr val="1C222B"/>
+                </a:solidFill>
+                <a:latin typeface="Calibri"/>
+              </a:rPr>
+              <a:t> per sample, all three horizons in one pass, 10.5x faster than three tree models, within a 10 Hz vehicle-compute budget.</a:t>
+            </a:r>
+          </a:p>
+        </p:txBody>
+      </p:sp>
+      <p:pic>
+        <p:nvPicPr>
+          <p:cNvPr id="6" name="Picture 5">
+            <a:extLst>
+              <a:ext uri="{FF2B5EF4-FFF2-40B4-BE49-F238E27FC236}">
+                <a16:creationId xmlns:a16="http://schemas.microsoft.com/office/drawing/2014/main" id="{13A31EFB-66C6-FE60-0FD1-EC3DAC32037B}"/>
+              </a:ext>
+            </a:extLst>
+          </p:cNvPr>
+          <p:cNvPicPr>
+            <a:picLocks noChangeAspect="1"/>
+          </p:cNvPicPr>
+          <p:nvPr/>
+        </p:nvPicPr>
+        <p:blipFill>
+          <a:blip r:embed="rId6"/>
+          <a:stretch>
+            <a:fillRect/>
+          </a:stretch>
+        </p:blipFill>
+        <p:spPr>
+          <a:xfrm>
+            <a:off x="469860" y="5369384"/>
+            <a:ext cx="7179696" cy="5058843"/>
+          </a:xfrm>
+          <a:prstGeom prst="rect">
+            <a:avLst/>
+          </a:prstGeom>
+        </p:spPr>
+      </p:pic>
+      <p:pic>
+        <p:nvPicPr>
+          <p:cNvPr id="8" name="Picture 7">
+            <a:extLst>
+              <a:ext uri="{FF2B5EF4-FFF2-40B4-BE49-F238E27FC236}">
+                <a16:creationId xmlns:a16="http://schemas.microsoft.com/office/drawing/2014/main" id="{1EE2B2CC-9568-347C-39C4-EC756CED5A04}"/>
+              </a:ext>
+            </a:extLst>
+          </p:cNvPr>
+          <p:cNvPicPr>
+            <a:picLocks noChangeAspect="1"/>
+          </p:cNvPicPr>
+          <p:nvPr/>
+        </p:nvPicPr>
+        <p:blipFill>
+          <a:blip r:embed="rId7"/>
+          <a:stretch>
+            <a:fillRect/>
+          </a:stretch>
+        </p:blipFill>
+        <p:spPr>
+          <a:xfrm>
+            <a:off x="1810339" y="16774155"/>
+            <a:ext cx="10645786" cy="3502880"/>
+          </a:xfrm>
+          <a:prstGeom prst="rect">
+            <a:avLst/>
+          </a:prstGeom>
+        </p:spPr>
+      </p:pic>
+      <p:pic>
+        <p:nvPicPr>
+          <p:cNvPr id="9" name="Picture 8">
+            <a:extLst>
+              <a:ext uri="{FF2B5EF4-FFF2-40B4-BE49-F238E27FC236}">
+                <a16:creationId xmlns:a16="http://schemas.microsoft.com/office/drawing/2014/main" id="{DA790CB9-2079-3011-574C-F69C7EFBF078}"/>
+              </a:ext>
+            </a:extLst>
+          </p:cNvPr>
+          <p:cNvPicPr>
+            <a:picLocks noChangeAspect="1"/>
+          </p:cNvPicPr>
+          <p:nvPr/>
+        </p:nvPicPr>
+        <p:blipFill>
+          <a:blip r:embed="rId8"/>
+          <a:stretch>
+            <a:fillRect/>
+          </a:stretch>
+        </p:blipFill>
+        <p:spPr>
+          <a:xfrm>
+            <a:off x="2644908" y="21697064"/>
+            <a:ext cx="10047813" cy="3357297"/>
+          </a:xfrm>
+          <a:prstGeom prst="rect">
+            <a:avLst/>
+          </a:prstGeom>
+        </p:spPr>
+      </p:pic>
+      <p:pic>
+        <p:nvPicPr>
+          <p:cNvPr id="10" name="Picture 9">
+            <a:extLst>
+              <a:ext uri="{FF2B5EF4-FFF2-40B4-BE49-F238E27FC236}">
+                <a16:creationId xmlns:a16="http://schemas.microsoft.com/office/drawing/2014/main" id="{FCBCB616-AE27-CE03-6D3F-55AAA4B96D7A}"/>
+              </a:ext>
+            </a:extLst>
+          </p:cNvPr>
+          <p:cNvPicPr>
+            <a:picLocks noChangeAspect="1"/>
+          </p:cNvPicPr>
+          <p:nvPr/>
+        </p:nvPicPr>
+        <p:blipFill>
+          <a:blip r:embed="rId9"/>
+          <a:stretch>
+            <a:fillRect/>
+          </a:stretch>
+        </p:blipFill>
+        <p:spPr>
+          <a:xfrm>
+            <a:off x="2664596" y="27505138"/>
+            <a:ext cx="8364010" cy="4256627"/>
+          </a:xfrm>
+          <a:prstGeom prst="rect">
+            <a:avLst/>
+          </a:prstGeom>
+        </p:spPr>
+      </p:pic>
+      <p:pic>
+        <p:nvPicPr>
+          <p:cNvPr id="16" name="Picture 15">
+            <a:extLst>
+              <a:ext uri="{FF2B5EF4-FFF2-40B4-BE49-F238E27FC236}">
+                <a16:creationId xmlns:a16="http://schemas.microsoft.com/office/drawing/2014/main" id="{7C78A299-A69B-8684-2093-0AB1F508263C}"/>
+              </a:ext>
+            </a:extLst>
+          </p:cNvPr>
+          <p:cNvPicPr>
+            <a:picLocks noChangeAspect="1"/>
+          </p:cNvPicPr>
+          <p:nvPr/>
+        </p:nvPicPr>
+        <p:blipFill>
+          <a:blip r:embed="rId10"/>
+          <a:stretch>
+            <a:fillRect/>
+          </a:stretch>
+        </p:blipFill>
+        <p:spPr>
+          <a:xfrm>
+            <a:off x="20778123" y="12611490"/>
+            <a:ext cx="6729233" cy="3591329"/>
+          </a:xfrm>
+          <a:prstGeom prst="rect">
+            <a:avLst/>
+          </a:prstGeom>
+        </p:spPr>
+      </p:pic>
+      <p:pic>
+        <p:nvPicPr>
+          <p:cNvPr id="17" name="Picture 16">
+            <a:extLst>
+              <a:ext uri="{FF2B5EF4-FFF2-40B4-BE49-F238E27FC236}">
+                <a16:creationId xmlns:a16="http://schemas.microsoft.com/office/drawing/2014/main" id="{797A63A3-798B-E880-A38A-E8410D85B891}"/>
+              </a:ext>
+            </a:extLst>
+          </p:cNvPr>
+          <p:cNvPicPr>
+            <a:picLocks noChangeAspect="1"/>
+          </p:cNvPicPr>
+          <p:nvPr/>
+        </p:nvPicPr>
+        <p:blipFill>
+          <a:blip r:embed="rId11"/>
+          <a:stretch>
+            <a:fillRect/>
+          </a:stretch>
+        </p:blipFill>
+        <p:spPr>
+          <a:xfrm>
+            <a:off x="16418124" y="21629217"/>
+            <a:ext cx="9664304" cy="3948335"/>
+          </a:xfrm>
+          <a:prstGeom prst="rect">
+            <a:avLst/>
+          </a:prstGeom>
+        </p:spPr>
+      </p:pic>
+      <p:pic>
+        <p:nvPicPr>
+          <p:cNvPr id="18" name="Picture 17">
+            <a:extLst>
+              <a:ext uri="{FF2B5EF4-FFF2-40B4-BE49-F238E27FC236}">
+                <a16:creationId xmlns:a16="http://schemas.microsoft.com/office/drawing/2014/main" id="{B310F7F0-A5E6-ECBB-E530-1CF98455A9D0}"/>
+              </a:ext>
+            </a:extLst>
+          </p:cNvPr>
+          <p:cNvPicPr>
+            <a:picLocks noChangeAspect="1"/>
+          </p:cNvPicPr>
+          <p:nvPr/>
+        </p:nvPicPr>
+        <p:blipFill>
+          <a:blip r:embed="rId12"/>
+          <a:stretch>
+            <a:fillRect/>
+          </a:stretch>
+        </p:blipFill>
+        <p:spPr>
+          <a:xfrm>
+            <a:off x="15077155" y="27375912"/>
+            <a:ext cx="6525545" cy="4182337"/>
+          </a:xfrm>
+          <a:prstGeom prst="rect">
+            <a:avLst/>
+          </a:prstGeom>
+        </p:spPr>
+      </p:pic>
+      <p:pic>
+        <p:nvPicPr>
+          <p:cNvPr id="23" name="Picture 22">
+            <a:extLst>
+              <a:ext uri="{FF2B5EF4-FFF2-40B4-BE49-F238E27FC236}">
+                <a16:creationId xmlns:a16="http://schemas.microsoft.com/office/drawing/2014/main" id="{F6A6F2E3-C74F-B61E-9648-1FA2F2E61509}"/>
+              </a:ext>
+            </a:extLst>
+          </p:cNvPr>
+          <p:cNvPicPr>
+            <a:picLocks noChangeAspect="1"/>
+          </p:cNvPicPr>
+          <p:nvPr/>
+        </p:nvPicPr>
+        <p:blipFill>
+          <a:blip r:embed="rId13"/>
+          <a:stretch>
+            <a:fillRect/>
+          </a:stretch>
+        </p:blipFill>
+        <p:spPr>
+          <a:xfrm>
+            <a:off x="28980066" y="18627149"/>
+            <a:ext cx="13552395" cy="4531892"/>
+          </a:xfrm>
+          <a:prstGeom prst="rect">
+            <a:avLst/>
+          </a:prstGeom>
+        </p:spPr>
+      </p:pic>
+      <p:pic>
+        <p:nvPicPr>
+          <p:cNvPr id="28" name="Picture 27">
+            <a:extLst>
+              <a:ext uri="{FF2B5EF4-FFF2-40B4-BE49-F238E27FC236}">
+                <a16:creationId xmlns:a16="http://schemas.microsoft.com/office/drawing/2014/main" id="{A28FA2BF-57A6-E5F0-BCDE-921427AC777B}"/>
+              </a:ext>
+            </a:extLst>
+          </p:cNvPr>
+          <p:cNvPicPr>
+            <a:picLocks noChangeAspect="1"/>
+          </p:cNvPicPr>
+          <p:nvPr/>
+        </p:nvPicPr>
+        <p:blipFill>
+          <a:blip r:embed="rId14"/>
+          <a:stretch>
+            <a:fillRect/>
+          </a:stretch>
+        </p:blipFill>
+        <p:spPr>
+          <a:xfrm>
+            <a:off x="29039848" y="5059150"/>
+            <a:ext cx="6946239" cy="4253791"/>
+          </a:xfrm>
+          <a:prstGeom prst="rect">
+            <a:avLst/>
+          </a:prstGeom>
+        </p:spPr>
+      </p:pic>
     </p:spTree>
   </p:cSld>
   <p:clrMapOvr>
